--- a/LLM_homework.pptx
+++ b/LLM_homework.pptx
@@ -179,18 +179,18 @@
   <pc:docChgLst>
     <pc:chgData name="진주 김" userId="b7ca9863247fd854" providerId="LiveId" clId="{F5FA52D0-9AA9-4A58-8DD5-5B5C33A3442F}"/>
     <pc:docChg chg="undo custSel addSld delSld modSld">
-      <pc:chgData name="진주 김" userId="b7ca9863247fd854" providerId="LiveId" clId="{F5FA52D0-9AA9-4A58-8DD5-5B5C33A3442F}" dt="2026-04-05T10:28:38.595" v="4139" actId="15"/>
+      <pc:chgData name="진주 김" userId="b7ca9863247fd854" providerId="LiveId" clId="{F5FA52D0-9AA9-4A58-8DD5-5B5C33A3442F}" dt="2026-04-06T02:07:13.151" v="4151" actId="2085"/>
       <pc:docMkLst>
         <pc:docMk/>
       </pc:docMkLst>
       <pc:sldChg chg="modSp mod">
-        <pc:chgData name="진주 김" userId="b7ca9863247fd854" providerId="LiveId" clId="{F5FA52D0-9AA9-4A58-8DD5-5B5C33A3442F}" dt="2026-04-05T07:38:55.618" v="7" actId="20577"/>
+        <pc:chgData name="진주 김" userId="b7ca9863247fd854" providerId="LiveId" clId="{F5FA52D0-9AA9-4A58-8DD5-5B5C33A3442F}" dt="2026-04-06T02:06:42.294" v="4147" actId="20577"/>
         <pc:sldMkLst>
           <pc:docMk/>
           <pc:sldMk cId="2996839249" sldId="256"/>
         </pc:sldMkLst>
         <pc:spChg chg="mod">
-          <ac:chgData name="진주 김" userId="b7ca9863247fd854" providerId="LiveId" clId="{F5FA52D0-9AA9-4A58-8DD5-5B5C33A3442F}" dt="2026-04-05T07:38:55.618" v="7" actId="20577"/>
+          <ac:chgData name="진주 김" userId="b7ca9863247fd854" providerId="LiveId" clId="{F5FA52D0-9AA9-4A58-8DD5-5B5C33A3442F}" dt="2026-04-06T02:06:42.294" v="4147" actId="20577"/>
           <ac:spMkLst>
             <pc:docMk/>
             <pc:sldMk cId="2996839249" sldId="256"/>
@@ -302,11 +302,19 @@
         </pc:picChg>
       </pc:sldChg>
       <pc:sldChg chg="addSp delSp modSp mod">
-        <pc:chgData name="진주 김" userId="b7ca9863247fd854" providerId="LiveId" clId="{F5FA52D0-9AA9-4A58-8DD5-5B5C33A3442F}" dt="2026-04-05T10:28:38.595" v="4139" actId="15"/>
+        <pc:chgData name="진주 김" userId="b7ca9863247fd854" providerId="LiveId" clId="{F5FA52D0-9AA9-4A58-8DD5-5B5C33A3442F}" dt="2026-04-06T02:07:13.151" v="4151" actId="2085"/>
         <pc:sldMkLst>
           <pc:docMk/>
           <pc:sldMk cId="462684679" sldId="442"/>
         </pc:sldMkLst>
+        <pc:spChg chg="add mod">
+          <ac:chgData name="진주 김" userId="b7ca9863247fd854" providerId="LiveId" clId="{F5FA52D0-9AA9-4A58-8DD5-5B5C33A3442F}" dt="2026-04-06T02:07:13.151" v="4151" actId="2085"/>
+          <ac:spMkLst>
+            <pc:docMk/>
+            <pc:sldMk cId="462684679" sldId="442"/>
+            <ac:spMk id="2" creationId="{89165095-5C34-8B90-E007-868D44998B88}"/>
+          </ac:spMkLst>
+        </pc:spChg>
         <pc:spChg chg="del">
           <ac:chgData name="진주 김" userId="b7ca9863247fd854" providerId="LiveId" clId="{F5FA52D0-9AA9-4A58-8DD5-5B5C33A3442F}" dt="2026-04-05T07:43:46.552" v="118" actId="478"/>
           <ac:spMkLst>
@@ -813,7 +821,7 @@
           <a:p>
             <a:fld id="{19290499-B0E0-4FC3-9F45-28EC0C2DBC71}" type="datetimeFigureOut">
               <a:rPr lang="ko-KR" altLang="en-US" smtClean="0"/>
-              <a:t>2026-04-05</a:t>
+              <a:t>2026-04-06</a:t>
             </a:fld>
             <a:endParaRPr lang="ko-KR" altLang="en-US"/>
           </a:p>
@@ -1227,7 +1235,7 @@
           <a:p>
             <a:fld id="{42F764F9-9D84-42D1-B002-3633BC0ECDE6}" type="datetimeFigureOut">
               <a:rPr lang="ko-KR" altLang="en-US" smtClean="0"/>
-              <a:t>2026-04-05</a:t>
+              <a:t>2026-04-06</a:t>
             </a:fld>
             <a:endParaRPr lang="ko-KR" altLang="en-US"/>
           </a:p>
@@ -1425,7 +1433,7 @@
           <a:p>
             <a:fld id="{42F764F9-9D84-42D1-B002-3633BC0ECDE6}" type="datetimeFigureOut">
               <a:rPr lang="ko-KR" altLang="en-US" smtClean="0"/>
-              <a:t>2026-04-05</a:t>
+              <a:t>2026-04-06</a:t>
             </a:fld>
             <a:endParaRPr lang="ko-KR" altLang="en-US"/>
           </a:p>
@@ -1633,7 +1641,7 @@
           <a:p>
             <a:fld id="{42F764F9-9D84-42D1-B002-3633BC0ECDE6}" type="datetimeFigureOut">
               <a:rPr lang="ko-KR" altLang="en-US" smtClean="0"/>
-              <a:t>2026-04-05</a:t>
+              <a:t>2026-04-06</a:t>
             </a:fld>
             <a:endParaRPr lang="ko-KR" altLang="en-US"/>
           </a:p>
@@ -1831,7 +1839,7 @@
           <a:p>
             <a:fld id="{42F764F9-9D84-42D1-B002-3633BC0ECDE6}" type="datetimeFigureOut">
               <a:rPr lang="ko-KR" altLang="en-US" smtClean="0"/>
-              <a:t>2026-04-05</a:t>
+              <a:t>2026-04-06</a:t>
             </a:fld>
             <a:endParaRPr lang="ko-KR" altLang="en-US"/>
           </a:p>
@@ -2106,7 +2114,7 @@
           <a:p>
             <a:fld id="{42F764F9-9D84-42D1-B002-3633BC0ECDE6}" type="datetimeFigureOut">
               <a:rPr lang="ko-KR" altLang="en-US" smtClean="0"/>
-              <a:t>2026-04-05</a:t>
+              <a:t>2026-04-06</a:t>
             </a:fld>
             <a:endParaRPr lang="ko-KR" altLang="en-US"/>
           </a:p>
@@ -2371,7 +2379,7 @@
           <a:p>
             <a:fld id="{42F764F9-9D84-42D1-B002-3633BC0ECDE6}" type="datetimeFigureOut">
               <a:rPr lang="ko-KR" altLang="en-US" smtClean="0"/>
-              <a:t>2026-04-05</a:t>
+              <a:t>2026-04-06</a:t>
             </a:fld>
             <a:endParaRPr lang="ko-KR" altLang="en-US"/>
           </a:p>
@@ -2783,7 +2791,7 @@
           <a:p>
             <a:fld id="{42F764F9-9D84-42D1-B002-3633BC0ECDE6}" type="datetimeFigureOut">
               <a:rPr lang="ko-KR" altLang="en-US" smtClean="0"/>
-              <a:t>2026-04-05</a:t>
+              <a:t>2026-04-06</a:t>
             </a:fld>
             <a:endParaRPr lang="ko-KR" altLang="en-US"/>
           </a:p>
@@ -2924,7 +2932,7 @@
           <a:p>
             <a:fld id="{42F764F9-9D84-42D1-B002-3633BC0ECDE6}" type="datetimeFigureOut">
               <a:rPr lang="ko-KR" altLang="en-US" smtClean="0"/>
-              <a:t>2026-04-05</a:t>
+              <a:t>2026-04-06</a:t>
             </a:fld>
             <a:endParaRPr lang="ko-KR" altLang="en-US"/>
           </a:p>
@@ -3037,7 +3045,7 @@
           <a:p>
             <a:fld id="{42F764F9-9D84-42D1-B002-3633BC0ECDE6}" type="datetimeFigureOut">
               <a:rPr lang="ko-KR" altLang="en-US" smtClean="0"/>
-              <a:t>2026-04-05</a:t>
+              <a:t>2026-04-06</a:t>
             </a:fld>
             <a:endParaRPr lang="ko-KR" altLang="en-US"/>
           </a:p>
@@ -3348,7 +3356,7 @@
           <a:p>
             <a:fld id="{42F764F9-9D84-42D1-B002-3633BC0ECDE6}" type="datetimeFigureOut">
               <a:rPr lang="ko-KR" altLang="en-US" smtClean="0"/>
-              <a:t>2026-04-05</a:t>
+              <a:t>2026-04-06</a:t>
             </a:fld>
             <a:endParaRPr lang="ko-KR" altLang="en-US"/>
           </a:p>
@@ -3636,7 +3644,7 @@
           <a:p>
             <a:fld id="{42F764F9-9D84-42D1-B002-3633BC0ECDE6}" type="datetimeFigureOut">
               <a:rPr lang="ko-KR" altLang="en-US" smtClean="0"/>
-              <a:t>2026-04-05</a:t>
+              <a:t>2026-04-06</a:t>
             </a:fld>
             <a:endParaRPr lang="ko-KR" altLang="en-US"/>
           </a:p>
@@ -3877,7 +3885,7 @@
           <a:p>
             <a:fld id="{42F764F9-9D84-42D1-B002-3633BC0ECDE6}" type="datetimeFigureOut">
               <a:rPr lang="ko-KR" altLang="en-US" smtClean="0"/>
-              <a:t>2026-04-05</a:t>
+              <a:t>2026-04-06</a:t>
             </a:fld>
             <a:endParaRPr lang="ko-KR" altLang="en-US"/>
           </a:p>
@@ -4324,14 +4332,14 @@
           <a:p>
             <a:pPr algn="ctr"/>
             <a:r>
-              <a:rPr lang="en-US" altLang="ko-KR" sz="4400" dirty="0" err="1">
+              <a:rPr lang="en-US" altLang="ko-KR" sz="4400" dirty="0">
                 <a:solidFill>
                   <a:srgbClr val="142C62"/>
                 </a:solidFill>
                 <a:latin typeface="나눔고딕 ExtraBold" panose="020D0904000000000000" pitchFamily="50" charset="-127"/>
                 <a:ea typeface="나눔고딕 ExtraBold" panose="020D0904000000000000" pitchFamily="50" charset="-127"/>
               </a:rPr>
-              <a:t>Homewokr</a:t>
+              <a:t>Homework</a:t>
             </a:r>
             <a:endParaRPr lang="ko-KR" altLang="en-US" sz="4400" dirty="0">
               <a:solidFill>
@@ -5305,6 +5313,58 @@
               </a:rPr>
               <a:t>사용자가 자연어로 약물에 대해 물으면 분석된 감성 데이터를 바탕으로 신뢰할 수 있는 답변 제공</a:t>
             </a:r>
+          </a:p>
+        </p:txBody>
+      </p:sp>
+      <p:sp>
+        <p:nvSpPr>
+          <p:cNvPr id="2" name="화살표: 아래쪽 1">
+            <a:extLst>
+              <a:ext uri="{FF2B5EF4-FFF2-40B4-BE49-F238E27FC236}">
+                <a16:creationId xmlns:a16="http://schemas.microsoft.com/office/drawing/2014/main" id="{89165095-5C34-8B90-E007-868D44998B88}"/>
+              </a:ext>
+            </a:extLst>
+          </p:cNvPr>
+          <p:cNvSpPr/>
+          <p:nvPr/>
+        </p:nvSpPr>
+        <p:spPr>
+          <a:xfrm>
+            <a:off x="5742332" y="2223247"/>
+            <a:ext cx="537882" cy="261610"/>
+          </a:xfrm>
+          <a:prstGeom prst="downArrow">
+            <a:avLst/>
+          </a:prstGeom>
+          <a:solidFill>
+            <a:schemeClr val="tx1"/>
+          </a:solidFill>
+          <a:ln>
+            <a:noFill/>
+          </a:ln>
+        </p:spPr>
+        <p:style>
+          <a:lnRef idx="2">
+            <a:schemeClr val="accent1">
+              <a:shade val="15000"/>
+            </a:schemeClr>
+          </a:lnRef>
+          <a:fillRef idx="1">
+            <a:schemeClr val="accent1"/>
+          </a:fillRef>
+          <a:effectRef idx="0">
+            <a:schemeClr val="accent1"/>
+          </a:effectRef>
+          <a:fontRef idx="minor">
+            <a:schemeClr val="lt1"/>
+          </a:fontRef>
+        </p:style>
+        <p:txBody>
+          <a:bodyPr rtlCol="0" anchor="ctr"/>
+          <a:lstStyle/>
+          <a:p>
+            <a:pPr algn="ctr"/>
+            <a:endParaRPr lang="ko-KR" altLang="en-US"/>
           </a:p>
         </p:txBody>
       </p:sp>

--- a/LLM_homework.pptx
+++ b/LLM_homework.pptx
@@ -169,7 +169,7 @@
 <file path=ppt/revisionInfo.xml><?xml version="1.0" encoding="utf-8"?>
 <p1510:revInfo xmlns:a="http://schemas.openxmlformats.org/drawingml/2006/main" xmlns:r="http://schemas.openxmlformats.org/officeDocument/2006/relationships" xmlns:p1510="http://schemas.microsoft.com/office/powerpoint/2015/10/main">
   <p1510:revLst>
-    <p1510:client id="{4343C8BE-D060-469B-B02E-D48DB97F701D}" v="14" dt="2026-04-05T10:28:22.947"/>
+    <p1510:client id="{4343C8BE-D060-469B-B02E-D48DB97F701D}" v="41" dt="2026-04-07T09:56:36.125"/>
   </p1510:revLst>
 </p1510:revInfo>
 </file>
@@ -179,7 +179,7 @@
   <pc:docChgLst>
     <pc:chgData name="진주 김" userId="b7ca9863247fd854" providerId="LiveId" clId="{F5FA52D0-9AA9-4A58-8DD5-5B5C33A3442F}"/>
     <pc:docChg chg="undo custSel addSld delSld modSld">
-      <pc:chgData name="진주 김" userId="b7ca9863247fd854" providerId="LiveId" clId="{F5FA52D0-9AA9-4A58-8DD5-5B5C33A3442F}" dt="2026-04-06T02:07:13.151" v="4151" actId="2085"/>
+      <pc:chgData name="진주 김" userId="b7ca9863247fd854" providerId="LiveId" clId="{F5FA52D0-9AA9-4A58-8DD5-5B5C33A3442F}" dt="2026-04-07T10:00:31.750" v="5244" actId="20577"/>
       <pc:docMkLst>
         <pc:docMk/>
       </pc:docMkLst>
@@ -199,33 +199,25 @@
         </pc:spChg>
       </pc:sldChg>
       <pc:sldChg chg="addSp delSp modSp mod setBg">
-        <pc:chgData name="진주 김" userId="b7ca9863247fd854" providerId="LiveId" clId="{F5FA52D0-9AA9-4A58-8DD5-5B5C33A3442F}" dt="2026-04-05T10:17:24.059" v="2271" actId="1076"/>
+        <pc:chgData name="진주 김" userId="b7ca9863247fd854" providerId="LiveId" clId="{F5FA52D0-9AA9-4A58-8DD5-5B5C33A3442F}" dt="2026-04-07T09:42:44.278" v="4626" actId="1076"/>
         <pc:sldMkLst>
           <pc:docMk/>
           <pc:sldMk cId="1202215572" sldId="378"/>
         </pc:sldMkLst>
-        <pc:spChg chg="del">
-          <ac:chgData name="진주 김" userId="b7ca9863247fd854" providerId="LiveId" clId="{F5FA52D0-9AA9-4A58-8DD5-5B5C33A3442F}" dt="2026-04-05T07:40:03.832" v="114" actId="478"/>
+        <pc:spChg chg="add mod">
+          <ac:chgData name="진주 김" userId="b7ca9863247fd854" providerId="LiveId" clId="{F5FA52D0-9AA9-4A58-8DD5-5B5C33A3442F}" dt="2026-04-07T09:42:19.130" v="4603" actId="1076"/>
           <ac:spMkLst>
             <pc:docMk/>
             <pc:sldMk cId="1202215572" sldId="378"/>
-            <ac:spMk id="3" creationId="{07D5AAF4-3DEF-35D0-48DA-553993BB8108}"/>
+            <ac:spMk id="2" creationId="{F8FAEC7C-67E3-5707-1BA6-78EA3225ED61}"/>
           </ac:spMkLst>
         </pc:spChg>
-        <pc:spChg chg="del mod">
-          <ac:chgData name="진주 김" userId="b7ca9863247fd854" providerId="LiveId" clId="{F5FA52D0-9AA9-4A58-8DD5-5B5C33A3442F}" dt="2026-04-05T08:22:32.532" v="1943" actId="478"/>
+        <pc:spChg chg="add mod">
+          <ac:chgData name="진주 김" userId="b7ca9863247fd854" providerId="LiveId" clId="{F5FA52D0-9AA9-4A58-8DD5-5B5C33A3442F}" dt="2026-04-07T09:42:44.278" v="4626" actId="1076"/>
           <ac:spMkLst>
             <pc:docMk/>
             <pc:sldMk cId="1202215572" sldId="378"/>
-            <ac:spMk id="4" creationId="{8D0B0647-CB3E-6392-AD7B-C729E5FEF14B}"/>
-          </ac:spMkLst>
-        </pc:spChg>
-        <pc:spChg chg="add del mod">
-          <ac:chgData name="진주 김" userId="b7ca9863247fd854" providerId="LiveId" clId="{F5FA52D0-9AA9-4A58-8DD5-5B5C33A3442F}" dt="2026-04-05T07:40:06.812" v="115" actId="478"/>
-          <ac:spMkLst>
-            <pc:docMk/>
-            <pc:sldMk cId="1202215572" sldId="378"/>
-            <ac:spMk id="5" creationId="{0E98EA25-284B-0860-F3FE-BF953120768A}"/>
+            <ac:spMk id="4" creationId="{66C317EC-CECD-7151-4EE6-02CD47427FC9}"/>
           </ac:spMkLst>
         </pc:spChg>
         <pc:spChg chg="mod">
@@ -236,64 +228,8 @@
             <ac:spMk id="12" creationId="{37AB3D86-0BAC-60E9-B777-464880CAA396}"/>
           </ac:spMkLst>
         </pc:spChg>
-        <pc:spChg chg="add del">
-          <ac:chgData name="진주 김" userId="b7ca9863247fd854" providerId="LiveId" clId="{F5FA52D0-9AA9-4A58-8DD5-5B5C33A3442F}" dt="2026-04-05T10:03:13.349" v="2265" actId="26606"/>
-          <ac:spMkLst>
-            <pc:docMk/>
-            <pc:sldMk cId="1202215572" sldId="378"/>
-            <ac:spMk id="23" creationId="{D4771268-CB57-404A-9271-370EB28F6090}"/>
-          </ac:spMkLst>
-        </pc:spChg>
-        <pc:picChg chg="add del mod">
-          <ac:chgData name="진주 김" userId="b7ca9863247fd854" providerId="LiveId" clId="{F5FA52D0-9AA9-4A58-8DD5-5B5C33A3442F}" dt="2026-04-05T08:23:52.591" v="1947" actId="478"/>
-          <ac:picMkLst>
-            <pc:docMk/>
-            <pc:sldMk cId="1202215572" sldId="378"/>
-            <ac:picMk id="7" creationId="{600FD2D8-F1A5-B2C8-4A66-3A13845D7348}"/>
-          </ac:picMkLst>
-        </pc:picChg>
-        <pc:picChg chg="add del mod">
-          <ac:chgData name="진주 김" userId="b7ca9863247fd854" providerId="LiveId" clId="{F5FA52D0-9AA9-4A58-8DD5-5B5C33A3442F}" dt="2026-04-05T08:40:20.317" v="1956" actId="478"/>
-          <ac:picMkLst>
-            <pc:docMk/>
-            <pc:sldMk cId="1202215572" sldId="378"/>
-            <ac:picMk id="9" creationId="{F6B17FD6-90FC-64B7-B61F-23D0FDCB4075}"/>
-          </ac:picMkLst>
-        </pc:picChg>
-        <pc:picChg chg="add del mod">
-          <ac:chgData name="진주 김" userId="b7ca9863247fd854" providerId="LiveId" clId="{F5FA52D0-9AA9-4A58-8DD5-5B5C33A3442F}" dt="2026-04-05T09:25:57.738" v="2255" actId="478"/>
-          <ac:picMkLst>
-            <pc:docMk/>
-            <pc:sldMk cId="1202215572" sldId="378"/>
-            <ac:picMk id="11" creationId="{D5047780-FEEA-C32B-929C-EBF388154386}"/>
-          </ac:picMkLst>
-        </pc:picChg>
-        <pc:picChg chg="add del mod">
-          <ac:chgData name="진주 김" userId="b7ca9863247fd854" providerId="LiveId" clId="{F5FA52D0-9AA9-4A58-8DD5-5B5C33A3442F}" dt="2026-04-05T09:53:26.122" v="2259" actId="478"/>
-          <ac:picMkLst>
-            <pc:docMk/>
-            <pc:sldMk cId="1202215572" sldId="378"/>
-            <ac:picMk id="14" creationId="{ABAD7C96-AA02-2317-1E98-C8766B0775A1}"/>
-          </ac:picMkLst>
-        </pc:picChg>
-        <pc:picChg chg="add del">
-          <ac:chgData name="진주 김" userId="b7ca9863247fd854" providerId="LiveId" clId="{F5FA52D0-9AA9-4A58-8DD5-5B5C33A3442F}" dt="2026-04-05T10:03:08.388" v="2262" actId="478"/>
-          <ac:picMkLst>
-            <pc:docMk/>
-            <pc:sldMk cId="1202215572" sldId="378"/>
-            <ac:picMk id="16" creationId="{031A9A6E-0E5B-4304-1546-5745DBF257D8}"/>
-          </ac:picMkLst>
-        </pc:picChg>
-        <pc:picChg chg="add del mod">
-          <ac:chgData name="진주 김" userId="b7ca9863247fd854" providerId="LiveId" clId="{F5FA52D0-9AA9-4A58-8DD5-5B5C33A3442F}" dt="2026-04-05T10:17:13.593" v="2266" actId="478"/>
-          <ac:picMkLst>
-            <pc:docMk/>
-            <pc:sldMk cId="1202215572" sldId="378"/>
-            <ac:picMk id="18" creationId="{34A50432-4981-D098-BF34-8DC5BB87A069}"/>
-          </ac:picMkLst>
-        </pc:picChg>
         <pc:picChg chg="add mod">
-          <ac:chgData name="진주 김" userId="b7ca9863247fd854" providerId="LiveId" clId="{F5FA52D0-9AA9-4A58-8DD5-5B5C33A3442F}" dt="2026-04-05T10:17:24.059" v="2271" actId="1076"/>
+          <ac:chgData name="진주 김" userId="b7ca9863247fd854" providerId="LiveId" clId="{F5FA52D0-9AA9-4A58-8DD5-5B5C33A3442F}" dt="2026-04-07T09:42:10.944" v="4600" actId="1076"/>
           <ac:picMkLst>
             <pc:docMk/>
             <pc:sldMk cId="1202215572" sldId="378"/>
@@ -315,52 +251,12 @@
             <ac:spMk id="2" creationId="{89165095-5C34-8B90-E007-868D44998B88}"/>
           </ac:spMkLst>
         </pc:spChg>
-        <pc:spChg chg="del">
-          <ac:chgData name="진주 김" userId="b7ca9863247fd854" providerId="LiveId" clId="{F5FA52D0-9AA9-4A58-8DD5-5B5C33A3442F}" dt="2026-04-05T07:43:46.552" v="118" actId="478"/>
-          <ac:spMkLst>
-            <pc:docMk/>
-            <pc:sldMk cId="462684679" sldId="442"/>
-            <ac:spMk id="2" creationId="{AB274FF0-73AD-2901-EE9D-70AB03A1C27E}"/>
-          </ac:spMkLst>
-        </pc:spChg>
         <pc:spChg chg="mod">
           <ac:chgData name="진주 김" userId="b7ca9863247fd854" providerId="LiveId" clId="{F5FA52D0-9AA9-4A58-8DD5-5B5C33A3442F}" dt="2026-04-05T07:39:08.617" v="18" actId="20577"/>
           <ac:spMkLst>
             <pc:docMk/>
             <pc:sldMk cId="462684679" sldId="442"/>
             <ac:spMk id="7" creationId="{8C87D1ED-FFA2-C313-573D-3E2FA112B19E}"/>
-          </ac:spMkLst>
-        </pc:spChg>
-        <pc:spChg chg="del mod">
-          <ac:chgData name="진주 김" userId="b7ca9863247fd854" providerId="LiveId" clId="{F5FA52D0-9AA9-4A58-8DD5-5B5C33A3442F}" dt="2026-04-05T08:24:25.923" v="1951" actId="478"/>
-          <ac:spMkLst>
-            <pc:docMk/>
-            <pc:sldMk cId="462684679" sldId="442"/>
-            <ac:spMk id="9" creationId="{26D51EE5-1E74-9877-726E-B73C63D24750}"/>
-          </ac:spMkLst>
-        </pc:spChg>
-        <pc:spChg chg="del">
-          <ac:chgData name="진주 김" userId="b7ca9863247fd854" providerId="LiveId" clId="{F5FA52D0-9AA9-4A58-8DD5-5B5C33A3442F}" dt="2026-04-05T07:43:43.717" v="117" actId="478"/>
-          <ac:spMkLst>
-            <pc:docMk/>
-            <pc:sldMk cId="462684679" sldId="442"/>
-            <ac:spMk id="14" creationId="{B2A6BC4F-8526-0652-530D-B30132C1508F}"/>
-          </ac:spMkLst>
-        </pc:spChg>
-        <pc:spChg chg="del">
-          <ac:chgData name="진주 김" userId="b7ca9863247fd854" providerId="LiveId" clId="{F5FA52D0-9AA9-4A58-8DD5-5B5C33A3442F}" dt="2026-04-05T07:43:43.717" v="117" actId="478"/>
-          <ac:spMkLst>
-            <pc:docMk/>
-            <pc:sldMk cId="462684679" sldId="442"/>
-            <ac:spMk id="15" creationId="{9C403DDD-9C09-7777-DC39-C9494439C321}"/>
-          </ac:spMkLst>
-        </pc:spChg>
-        <pc:spChg chg="del">
-          <ac:chgData name="진주 김" userId="b7ca9863247fd854" providerId="LiveId" clId="{F5FA52D0-9AA9-4A58-8DD5-5B5C33A3442F}" dt="2026-04-05T07:43:43.717" v="117" actId="478"/>
-          <ac:spMkLst>
-            <pc:docMk/>
-            <pc:sldMk cId="462684679" sldId="442"/>
-            <ac:spMk id="17" creationId="{FD266ED0-64EC-BAFE-75C8-E7171B0122AF}"/>
           </ac:spMkLst>
         </pc:spChg>
         <pc:spChg chg="add mod">
@@ -371,249 +267,29 @@
             <ac:spMk id="23" creationId="{48ECEF32-9BCF-AAF8-CDD2-02821416F53C}"/>
           </ac:spMkLst>
         </pc:spChg>
-        <pc:picChg chg="add del mod">
-          <ac:chgData name="진주 김" userId="b7ca9863247fd854" providerId="LiveId" clId="{F5FA52D0-9AA9-4A58-8DD5-5B5C33A3442F}" dt="2026-04-05T08:40:51.685" v="1962" actId="478"/>
-          <ac:picMkLst>
-            <pc:docMk/>
-            <pc:sldMk cId="462684679" sldId="442"/>
-            <ac:picMk id="8" creationId="{44F9D10C-7E7B-BB14-2EBE-3DF98348E4B7}"/>
-          </ac:picMkLst>
-        </pc:picChg>
-        <pc:picChg chg="del">
-          <ac:chgData name="진주 김" userId="b7ca9863247fd854" providerId="LiveId" clId="{F5FA52D0-9AA9-4A58-8DD5-5B5C33A3442F}" dt="2026-04-05T07:43:43.717" v="117" actId="478"/>
-          <ac:picMkLst>
-            <pc:docMk/>
-            <pc:sldMk cId="462684679" sldId="442"/>
-            <ac:picMk id="13" creationId="{AD1D7AB5-64F0-0475-E19A-BFD3BC7093AA}"/>
-          </ac:picMkLst>
-        </pc:picChg>
-        <pc:picChg chg="del">
-          <ac:chgData name="진주 김" userId="b7ca9863247fd854" providerId="LiveId" clId="{F5FA52D0-9AA9-4A58-8DD5-5B5C33A3442F}" dt="2026-04-05T07:43:43.717" v="117" actId="478"/>
-          <ac:picMkLst>
-            <pc:docMk/>
-            <pc:sldMk cId="462684679" sldId="442"/>
-            <ac:picMk id="16" creationId="{D62BD3D0-0294-1237-D023-BC6E7DEE038C}"/>
-          </ac:picMkLst>
-        </pc:picChg>
-        <pc:picChg chg="del">
-          <ac:chgData name="진주 김" userId="b7ca9863247fd854" providerId="LiveId" clId="{F5FA52D0-9AA9-4A58-8DD5-5B5C33A3442F}" dt="2026-04-05T07:43:43.717" v="117" actId="478"/>
-          <ac:picMkLst>
-            <pc:docMk/>
-            <pc:sldMk cId="462684679" sldId="442"/>
-            <ac:picMk id="18" creationId="{BAAA9A9E-B286-71C6-D5F5-5F167A739515}"/>
-          </ac:picMkLst>
-        </pc:picChg>
-        <pc:picChg chg="add del mod">
-          <ac:chgData name="진주 김" userId="b7ca9863247fd854" providerId="LiveId" clId="{F5FA52D0-9AA9-4A58-8DD5-5B5C33A3442F}" dt="2026-04-05T08:40:52.261" v="1964" actId="478"/>
-          <ac:picMkLst>
-            <pc:docMk/>
-            <pc:sldMk cId="462684679" sldId="442"/>
-            <ac:picMk id="20" creationId="{6000891D-61E2-CFED-D1A5-1CF29DD6A031}"/>
-          </ac:picMkLst>
-        </pc:picChg>
-        <pc:picChg chg="add del mod">
-          <ac:chgData name="진주 김" userId="b7ca9863247fd854" providerId="LiveId" clId="{F5FA52D0-9AA9-4A58-8DD5-5B5C33A3442F}" dt="2026-04-05T09:55:15.479" v="2261" actId="478"/>
-          <ac:picMkLst>
-            <pc:docMk/>
-            <pc:sldMk cId="462684679" sldId="442"/>
-            <ac:picMk id="22" creationId="{C8484455-E8A8-9866-4D7A-3A190C184796}"/>
-          </ac:picMkLst>
-        </pc:picChg>
-      </pc:sldChg>
-      <pc:sldChg chg="addSp delSp modSp del mod">
-        <pc:chgData name="진주 김" userId="b7ca9863247fd854" providerId="LiveId" clId="{F5FA52D0-9AA9-4A58-8DD5-5B5C33A3442F}" dt="2026-04-05T10:27:15.700" v="3954" actId="2696"/>
-        <pc:sldMkLst>
-          <pc:docMk/>
-          <pc:sldMk cId="3579241681" sldId="544"/>
-        </pc:sldMkLst>
-        <pc:spChg chg="del mod">
-          <ac:chgData name="진주 김" userId="b7ca9863247fd854" providerId="LiveId" clId="{F5FA52D0-9AA9-4A58-8DD5-5B5C33A3442F}" dt="2026-04-05T07:55:16.489" v="1095" actId="478"/>
-          <ac:spMkLst>
-            <pc:docMk/>
-            <pc:sldMk cId="3579241681" sldId="544"/>
-            <ac:spMk id="3" creationId="{649AFBA6-6165-7D67-B103-DE53FA9727C6}"/>
-          </ac:spMkLst>
-        </pc:spChg>
-        <pc:spChg chg="mod">
-          <ac:chgData name="진주 김" userId="b7ca9863247fd854" providerId="LiveId" clId="{F5FA52D0-9AA9-4A58-8DD5-5B5C33A3442F}" dt="2026-04-05T07:53:46.993" v="1055" actId="20577"/>
-          <ac:spMkLst>
-            <pc:docMk/>
-            <pc:sldMk cId="3579241681" sldId="544"/>
-            <ac:spMk id="5" creationId="{664F941C-D557-5E4A-BFB3-88FCECAFEC07}"/>
-          </ac:spMkLst>
-        </pc:spChg>
-        <pc:spChg chg="mod">
-          <ac:chgData name="진주 김" userId="b7ca9863247fd854" providerId="LiveId" clId="{F5FA52D0-9AA9-4A58-8DD5-5B5C33A3442F}" dt="2026-04-05T07:53:55.568" v="1082" actId="20577"/>
-          <ac:spMkLst>
-            <pc:docMk/>
-            <pc:sldMk cId="3579241681" sldId="544"/>
-            <ac:spMk id="7" creationId="{C9D6DEEA-5D5D-CF19-0CC5-6BD3F0A87F31}"/>
-          </ac:spMkLst>
-        </pc:spChg>
-        <pc:spChg chg="del">
-          <ac:chgData name="진주 김" userId="b7ca9863247fd854" providerId="LiveId" clId="{F5FA52D0-9AA9-4A58-8DD5-5B5C33A3442F}" dt="2026-04-05T07:55:19.105" v="1096" actId="478"/>
-          <ac:spMkLst>
-            <pc:docMk/>
-            <pc:sldMk cId="3579241681" sldId="544"/>
-            <ac:spMk id="8" creationId="{2997166C-D638-9281-51F6-CF3DE083203C}"/>
-          </ac:spMkLst>
-        </pc:spChg>
-        <pc:spChg chg="mod">
-          <ac:chgData name="진주 김" userId="b7ca9863247fd854" providerId="LiveId" clId="{F5FA52D0-9AA9-4A58-8DD5-5B5C33A3442F}" dt="2026-04-05T07:54:33.885" v="1090" actId="207"/>
-          <ac:spMkLst>
-            <pc:docMk/>
-            <pc:sldMk cId="3579241681" sldId="544"/>
-            <ac:spMk id="9" creationId="{6BC00828-4C8C-AECC-C1E5-E38D23B8BCC8}"/>
-          </ac:spMkLst>
-        </pc:spChg>
-        <pc:picChg chg="add mod">
-          <ac:chgData name="진주 김" userId="b7ca9863247fd854" providerId="LiveId" clId="{F5FA52D0-9AA9-4A58-8DD5-5B5C33A3442F}" dt="2026-04-05T07:55:27.809" v="1102" actId="1076"/>
-          <ac:picMkLst>
-            <pc:docMk/>
-            <pc:sldMk cId="3579241681" sldId="544"/>
-            <ac:picMk id="13" creationId="{6D56C040-B262-56B5-6EF1-B7A6B977626D}"/>
-          </ac:picMkLst>
-        </pc:picChg>
-      </pc:sldChg>
-      <pc:sldChg chg="del">
-        <pc:chgData name="진주 김" userId="b7ca9863247fd854" providerId="LiveId" clId="{F5FA52D0-9AA9-4A58-8DD5-5B5C33A3442F}" dt="2026-04-05T07:58:27.672" v="1924" actId="47"/>
-        <pc:sldMkLst>
-          <pc:docMk/>
-          <pc:sldMk cId="163688395" sldId="545"/>
-        </pc:sldMkLst>
-      </pc:sldChg>
-      <pc:sldChg chg="del">
-        <pc:chgData name="진주 김" userId="b7ca9863247fd854" providerId="LiveId" clId="{F5FA52D0-9AA9-4A58-8DD5-5B5C33A3442F}" dt="2026-04-05T07:58:28.596" v="1925" actId="47"/>
-        <pc:sldMkLst>
-          <pc:docMk/>
-          <pc:sldMk cId="347528980" sldId="546"/>
-        </pc:sldMkLst>
-      </pc:sldChg>
-      <pc:sldChg chg="del">
-        <pc:chgData name="진주 김" userId="b7ca9863247fd854" providerId="LiveId" clId="{F5FA52D0-9AA9-4A58-8DD5-5B5C33A3442F}" dt="2026-04-05T07:58:28.969" v="1926" actId="47"/>
-        <pc:sldMkLst>
-          <pc:docMk/>
-          <pc:sldMk cId="1559265967" sldId="547"/>
-        </pc:sldMkLst>
-      </pc:sldChg>
-      <pc:sldChg chg="del">
-        <pc:chgData name="진주 김" userId="b7ca9863247fd854" providerId="LiveId" clId="{F5FA52D0-9AA9-4A58-8DD5-5B5C33A3442F}" dt="2026-04-05T07:58:29.194" v="1927" actId="47"/>
-        <pc:sldMkLst>
-          <pc:docMk/>
-          <pc:sldMk cId="2834966565" sldId="548"/>
-        </pc:sldMkLst>
-      </pc:sldChg>
-      <pc:sldChg chg="del">
-        <pc:chgData name="진주 김" userId="b7ca9863247fd854" providerId="LiveId" clId="{F5FA52D0-9AA9-4A58-8DD5-5B5C33A3442F}" dt="2026-04-05T07:58:30.175" v="1933" actId="47"/>
-        <pc:sldMkLst>
-          <pc:docMk/>
-          <pc:sldMk cId="1050342589" sldId="549"/>
-        </pc:sldMkLst>
-      </pc:sldChg>
-      <pc:sldChg chg="del">
-        <pc:chgData name="진주 김" userId="b7ca9863247fd854" providerId="LiveId" clId="{F5FA52D0-9AA9-4A58-8DD5-5B5C33A3442F}" dt="2026-04-05T07:58:30.348" v="1934" actId="47"/>
-        <pc:sldMkLst>
-          <pc:docMk/>
-          <pc:sldMk cId="1676322719" sldId="550"/>
-        </pc:sldMkLst>
-      </pc:sldChg>
-      <pc:sldChg chg="del">
-        <pc:chgData name="진주 김" userId="b7ca9863247fd854" providerId="LiveId" clId="{F5FA52D0-9AA9-4A58-8DD5-5B5C33A3442F}" dt="2026-04-05T07:58:30.517" v="1935" actId="47"/>
-        <pc:sldMkLst>
-          <pc:docMk/>
-          <pc:sldMk cId="2685107536" sldId="551"/>
-        </pc:sldMkLst>
-      </pc:sldChg>
-      <pc:sldChg chg="del">
-        <pc:chgData name="진주 김" userId="b7ca9863247fd854" providerId="LiveId" clId="{F5FA52D0-9AA9-4A58-8DD5-5B5C33A3442F}" dt="2026-04-05T07:58:31.031" v="1938" actId="47"/>
-        <pc:sldMkLst>
-          <pc:docMk/>
-          <pc:sldMk cId="1368464785" sldId="552"/>
-        </pc:sldMkLst>
-      </pc:sldChg>
-      <pc:sldChg chg="del">
-        <pc:chgData name="진주 김" userId="b7ca9863247fd854" providerId="LiveId" clId="{F5FA52D0-9AA9-4A58-8DD5-5B5C33A3442F}" dt="2026-04-05T07:58:30.682" v="1936" actId="47"/>
-        <pc:sldMkLst>
-          <pc:docMk/>
-          <pc:sldMk cId="2157990625" sldId="553"/>
-        </pc:sldMkLst>
-      </pc:sldChg>
-      <pc:sldChg chg="del">
-        <pc:chgData name="진주 김" userId="b7ca9863247fd854" providerId="LiveId" clId="{F5FA52D0-9AA9-4A58-8DD5-5B5C33A3442F}" dt="2026-04-05T07:58:30.862" v="1937" actId="47"/>
-        <pc:sldMkLst>
-          <pc:docMk/>
-          <pc:sldMk cId="3593857037" sldId="554"/>
-        </pc:sldMkLst>
-      </pc:sldChg>
-      <pc:sldChg chg="del">
-        <pc:chgData name="진주 김" userId="b7ca9863247fd854" providerId="LiveId" clId="{F5FA52D0-9AA9-4A58-8DD5-5B5C33A3442F}" dt="2026-04-05T07:58:29.370" v="1928" actId="47"/>
-        <pc:sldMkLst>
-          <pc:docMk/>
-          <pc:sldMk cId="3858796299" sldId="555"/>
-        </pc:sldMkLst>
-      </pc:sldChg>
-      <pc:sldChg chg="del">
-        <pc:chgData name="진주 김" userId="b7ca9863247fd854" providerId="LiveId" clId="{F5FA52D0-9AA9-4A58-8DD5-5B5C33A3442F}" dt="2026-04-05T07:58:29.508" v="1929" actId="47"/>
-        <pc:sldMkLst>
-          <pc:docMk/>
-          <pc:sldMk cId="1561482485" sldId="556"/>
-        </pc:sldMkLst>
-      </pc:sldChg>
-      <pc:sldChg chg="del">
-        <pc:chgData name="진주 김" userId="b7ca9863247fd854" providerId="LiveId" clId="{F5FA52D0-9AA9-4A58-8DD5-5B5C33A3442F}" dt="2026-04-05T07:58:29.684" v="1930" actId="47"/>
-        <pc:sldMkLst>
-          <pc:docMk/>
-          <pc:sldMk cId="2944987607" sldId="557"/>
-        </pc:sldMkLst>
-      </pc:sldChg>
-      <pc:sldChg chg="del">
-        <pc:chgData name="진주 김" userId="b7ca9863247fd854" providerId="LiveId" clId="{F5FA52D0-9AA9-4A58-8DD5-5B5C33A3442F}" dt="2026-04-05T07:58:30.017" v="1932" actId="47"/>
-        <pc:sldMkLst>
-          <pc:docMk/>
-          <pc:sldMk cId="3623383632" sldId="558"/>
-        </pc:sldMkLst>
-      </pc:sldChg>
-      <pc:sldChg chg="del">
-        <pc:chgData name="진주 김" userId="b7ca9863247fd854" providerId="LiveId" clId="{F5FA52D0-9AA9-4A58-8DD5-5B5C33A3442F}" dt="2026-04-05T07:58:29.842" v="1931" actId="47"/>
-        <pc:sldMkLst>
-          <pc:docMk/>
-          <pc:sldMk cId="193025663" sldId="559"/>
-        </pc:sldMkLst>
-      </pc:sldChg>
-      <pc:sldChg chg="del">
-        <pc:chgData name="진주 김" userId="b7ca9863247fd854" providerId="LiveId" clId="{F5FA52D0-9AA9-4A58-8DD5-5B5C33A3442F}" dt="2026-04-05T07:58:33.103" v="1939" actId="47"/>
-        <pc:sldMkLst>
-          <pc:docMk/>
-          <pc:sldMk cId="86802579" sldId="560"/>
-        </pc:sldMkLst>
-      </pc:sldChg>
-      <pc:sldChg chg="del">
-        <pc:chgData name="진주 김" userId="b7ca9863247fd854" providerId="LiveId" clId="{F5FA52D0-9AA9-4A58-8DD5-5B5C33A3442F}" dt="2026-04-05T07:58:33.665" v="1940" actId="47"/>
-        <pc:sldMkLst>
-          <pc:docMk/>
-          <pc:sldMk cId="2724056756" sldId="561"/>
-        </pc:sldMkLst>
-      </pc:sldChg>
-      <pc:sldChg chg="del">
-        <pc:chgData name="진주 김" userId="b7ca9863247fd854" providerId="LiveId" clId="{F5FA52D0-9AA9-4A58-8DD5-5B5C33A3442F}" dt="2026-04-05T07:58:34.061" v="1941" actId="47"/>
-        <pc:sldMkLst>
-          <pc:docMk/>
-          <pc:sldMk cId="3078315303" sldId="562"/>
-        </pc:sldMkLst>
-      </pc:sldChg>
-      <pc:sldChg chg="del">
-        <pc:chgData name="진주 김" userId="b7ca9863247fd854" providerId="LiveId" clId="{F5FA52D0-9AA9-4A58-8DD5-5B5C33A3442F}" dt="2026-04-05T07:58:34.602" v="1942" actId="47"/>
-        <pc:sldMkLst>
-          <pc:docMk/>
-          <pc:sldMk cId="863315059" sldId="563"/>
-        </pc:sldMkLst>
       </pc:sldChg>
       <pc:sldChg chg="addSp delSp modSp add mod">
-        <pc:chgData name="진주 김" userId="b7ca9863247fd854" providerId="LiveId" clId="{F5FA52D0-9AA9-4A58-8DD5-5B5C33A3442F}" dt="2026-04-05T10:26:53.582" v="3953" actId="1076"/>
+        <pc:chgData name="진주 김" userId="b7ca9863247fd854" providerId="LiveId" clId="{F5FA52D0-9AA9-4A58-8DD5-5B5C33A3442F}" dt="2026-04-07T10:00:31.750" v="5244" actId="20577"/>
         <pc:sldMkLst>
           <pc:docMk/>
           <pc:sldMk cId="3156186178" sldId="564"/>
         </pc:sldMkLst>
+        <pc:spChg chg="add mod">
+          <ac:chgData name="진주 김" userId="b7ca9863247fd854" providerId="LiveId" clId="{F5FA52D0-9AA9-4A58-8DD5-5B5C33A3442F}" dt="2026-04-07T09:12:23.526" v="4183" actId="1076"/>
+          <ac:spMkLst>
+            <pc:docMk/>
+            <pc:sldMk cId="3156186178" sldId="564"/>
+            <ac:spMk id="2" creationId="{66D06C91-6FE0-E52A-3BC3-2D66E41BE464}"/>
+          </ac:spMkLst>
+        </pc:spChg>
+        <pc:spChg chg="add mod">
+          <ac:chgData name="진주 김" userId="b7ca9863247fd854" providerId="LiveId" clId="{F5FA52D0-9AA9-4A58-8DD5-5B5C33A3442F}" dt="2026-04-07T09:12:30.216" v="4186" actId="1076"/>
+          <ac:spMkLst>
+            <pc:docMk/>
+            <pc:sldMk cId="3156186178" sldId="564"/>
+            <ac:spMk id="3" creationId="{FF89289B-8C05-6311-B097-911453314BE6}"/>
+          </ac:spMkLst>
+        </pc:spChg>
         <pc:spChg chg="mod">
           <ac:chgData name="진주 김" userId="b7ca9863247fd854" providerId="LiveId" clId="{F5FA52D0-9AA9-4A58-8DD5-5B5C33A3442F}" dt="2026-04-05T07:47:25.911" v="834" actId="20577"/>
           <ac:spMkLst>
@@ -630,71 +306,71 @@
             <ac:spMk id="7" creationId="{C69A5EAF-A5A7-4B93-3A3B-EBBB9E6C532E}"/>
           </ac:spMkLst>
         </pc:spChg>
-        <pc:spChg chg="del">
-          <ac:chgData name="진주 김" userId="b7ca9863247fd854" providerId="LiveId" clId="{F5FA52D0-9AA9-4A58-8DD5-5B5C33A3442F}" dt="2026-04-05T07:45:46.181" v="801" actId="478"/>
+        <pc:spChg chg="add mod">
+          <ac:chgData name="진주 김" userId="b7ca9863247fd854" providerId="LiveId" clId="{F5FA52D0-9AA9-4A58-8DD5-5B5C33A3442F}" dt="2026-04-07T09:12:48.512" v="4188" actId="1076"/>
           <ac:spMkLst>
             <pc:docMk/>
             <pc:sldMk cId="3156186178" sldId="564"/>
-            <ac:spMk id="9" creationId="{BAA78C09-831F-31DD-DC8B-821E46DB4B5A}"/>
+            <ac:spMk id="8" creationId="{BEBD2ECE-E994-1DCE-D3BD-CC6B5C454CD3}"/>
           </ac:spMkLst>
         </pc:spChg>
         <pc:spChg chg="add mod">
-          <ac:chgData name="진주 김" userId="b7ca9863247fd854" providerId="LiveId" clId="{F5FA52D0-9AA9-4A58-8DD5-5B5C33A3442F}" dt="2026-04-05T10:26:53.582" v="3953" actId="1076"/>
+          <ac:chgData name="진주 김" userId="b7ca9863247fd854" providerId="LiveId" clId="{F5FA52D0-9AA9-4A58-8DD5-5B5C33A3442F}" dt="2026-04-07T09:13:17.568" v="4224" actId="14100"/>
+          <ac:spMkLst>
+            <pc:docMk/>
+            <pc:sldMk cId="3156186178" sldId="564"/>
+            <ac:spMk id="9" creationId="{04FA8CE5-6744-1823-7CD7-C692178CFDD9}"/>
+          </ac:spMkLst>
+        </pc:spChg>
+        <pc:spChg chg="add mod">
+          <ac:chgData name="진주 김" userId="b7ca9863247fd854" providerId="LiveId" clId="{F5FA52D0-9AA9-4A58-8DD5-5B5C33A3442F}" dt="2026-04-07T09:13:56.130" v="4262" actId="1076"/>
+          <ac:spMkLst>
+            <pc:docMk/>
+            <pc:sldMk cId="3156186178" sldId="564"/>
+            <ac:spMk id="13" creationId="{A803D1F1-426E-1B58-57D8-60CA01668FA3}"/>
+          </ac:spMkLst>
+        </pc:spChg>
+        <pc:spChg chg="add mod">
+          <ac:chgData name="진주 김" userId="b7ca9863247fd854" providerId="LiveId" clId="{F5FA52D0-9AA9-4A58-8DD5-5B5C33A3442F}" dt="2026-04-07T10:00:31.750" v="5244" actId="20577"/>
           <ac:spMkLst>
             <pc:docMk/>
             <pc:sldMk cId="3156186178" sldId="564"/>
             <ac:spMk id="14" creationId="{3711E073-981A-24AB-140E-8F3315D500A5}"/>
           </ac:spMkLst>
         </pc:spChg>
-        <pc:spChg chg="add del mod">
-          <ac:chgData name="진주 김" userId="b7ca9863247fd854" providerId="LiveId" clId="{F5FA52D0-9AA9-4A58-8DD5-5B5C33A3442F}" dt="2026-04-05T08:49:51.083" v="2253" actId="478"/>
+        <pc:spChg chg="add mod">
+          <ac:chgData name="진주 김" userId="b7ca9863247fd854" providerId="LiveId" clId="{F5FA52D0-9AA9-4A58-8DD5-5B5C33A3442F}" dt="2026-04-07T09:56:06.822" v="4722"/>
           <ac:spMkLst>
             <pc:docMk/>
             <pc:sldMk cId="3156186178" sldId="564"/>
-            <ac:spMk id="17" creationId="{F9B47EBB-BC23-B263-D114-3C721200D9A9}"/>
+            <ac:spMk id="15" creationId="{0A5702CA-708A-2CDA-F764-12E939C847B9}"/>
+          </ac:spMkLst>
+        </pc:spChg>
+        <pc:spChg chg="add mod">
+          <ac:chgData name="진주 김" userId="b7ca9863247fd854" providerId="LiveId" clId="{F5FA52D0-9AA9-4A58-8DD5-5B5C33A3442F}" dt="2026-04-07T09:56:36.124" v="4726" actId="14100"/>
+          <ac:spMkLst>
+            <pc:docMk/>
+            <pc:sldMk cId="3156186178" sldId="564"/>
+            <ac:spMk id="16" creationId="{8500A83C-0448-B984-F055-EE5BD5F6E286}"/>
           </ac:spMkLst>
         </pc:spChg>
         <pc:picChg chg="add del mod">
-          <ac:chgData name="진주 김" userId="b7ca9863247fd854" providerId="LiveId" clId="{F5FA52D0-9AA9-4A58-8DD5-5B5C33A3442F}" dt="2026-04-05T07:47:28.701" v="835" actId="478"/>
-          <ac:picMkLst>
-            <pc:docMk/>
-            <pc:sldMk cId="3156186178" sldId="564"/>
-            <ac:picMk id="3" creationId="{7540C500-A823-B4CB-6740-6F57F92F017F}"/>
-          </ac:picMkLst>
-        </pc:picChg>
-        <pc:picChg chg="add del mod">
-          <ac:chgData name="진주 김" userId="b7ca9863247fd854" providerId="LiveId" clId="{F5FA52D0-9AA9-4A58-8DD5-5B5C33A3442F}" dt="2026-04-05T08:49:49.331" v="2251" actId="478"/>
-          <ac:picMkLst>
-            <pc:docMk/>
-            <pc:sldMk cId="3156186178" sldId="564"/>
-            <ac:picMk id="13" creationId="{B9A98EF3-1444-9AB1-FE81-9106073708A1}"/>
-          </ac:picMkLst>
-        </pc:picChg>
-        <pc:picChg chg="add del mod">
-          <ac:chgData name="진주 김" userId="b7ca9863247fd854" providerId="LiveId" clId="{F5FA52D0-9AA9-4A58-8DD5-5B5C33A3442F}" dt="2026-04-05T10:25:09.141" v="3431" actId="478"/>
+          <ac:chgData name="진주 김" userId="b7ca9863247fd854" providerId="LiveId" clId="{F5FA52D0-9AA9-4A58-8DD5-5B5C33A3442F}" dt="2026-04-07T09:12:26.533" v="4185" actId="1076"/>
           <ac:picMkLst>
             <pc:docMk/>
             <pc:sldMk cId="3156186178" sldId="564"/>
             <ac:picMk id="19" creationId="{C2CFAD31-703C-F864-4FC8-90446D85CA7B}"/>
           </ac:picMkLst>
         </pc:picChg>
-        <pc:cxnChg chg="add del mod">
-          <ac:chgData name="진주 김" userId="b7ca9863247fd854" providerId="LiveId" clId="{F5FA52D0-9AA9-4A58-8DD5-5B5C33A3442F}" dt="2026-04-05T08:49:52.294" v="2254" actId="478"/>
-          <ac:cxnSpMkLst>
-            <pc:docMk/>
-            <pc:sldMk cId="3156186178" sldId="564"/>
-            <ac:cxnSpMk id="16" creationId="{9BBE5BDB-D6AA-06F3-1967-A0874FF75152}"/>
-          </ac:cxnSpMkLst>
-        </pc:cxnChg>
       </pc:sldChg>
       <pc:sldChg chg="addSp delSp modSp add mod">
-        <pc:chgData name="진주 김" userId="b7ca9863247fd854" providerId="LiveId" clId="{F5FA52D0-9AA9-4A58-8DD5-5B5C33A3442F}" dt="2026-04-05T10:28:12.980" v="4126" actId="20577"/>
+        <pc:chgData name="진주 김" userId="b7ca9863247fd854" providerId="LiveId" clId="{F5FA52D0-9AA9-4A58-8DD5-5B5C33A3442F}" dt="2026-04-07T09:38:05.542" v="4539" actId="20577"/>
         <pc:sldMkLst>
           <pc:docMk/>
           <pc:sldMk cId="3592627706" sldId="565"/>
         </pc:sldMkLst>
         <pc:spChg chg="add mod">
-          <ac:chgData name="진주 김" userId="b7ca9863247fd854" providerId="LiveId" clId="{F5FA52D0-9AA9-4A58-8DD5-5B5C33A3442F}" dt="2026-04-05T10:28:12.980" v="4126" actId="20577"/>
+          <ac:chgData name="진주 김" userId="b7ca9863247fd854" providerId="LiveId" clId="{F5FA52D0-9AA9-4A58-8DD5-5B5C33A3442F}" dt="2026-04-07T09:38:05.542" v="4539" actId="20577"/>
           <ac:spMkLst>
             <pc:docMk/>
             <pc:sldMk cId="3592627706" sldId="565"/>
@@ -717,22 +393,6 @@
             <ac:spMk id="7" creationId="{88813777-E43D-FB58-0CC5-3E37235414D4}"/>
           </ac:spMkLst>
         </pc:spChg>
-        <pc:spChg chg="del">
-          <ac:chgData name="진주 김" userId="b7ca9863247fd854" providerId="LiveId" clId="{F5FA52D0-9AA9-4A58-8DD5-5B5C33A3442F}" dt="2026-04-05T07:56:06.844" v="1127" actId="478"/>
-          <ac:spMkLst>
-            <pc:docMk/>
-            <pc:sldMk cId="3592627706" sldId="565"/>
-            <ac:spMk id="9" creationId="{B19E8020-0146-3ADB-23CC-2E86E0AED2AE}"/>
-          </ac:spMkLst>
-        </pc:spChg>
-        <pc:picChg chg="del">
-          <ac:chgData name="진주 김" userId="b7ca9863247fd854" providerId="LiveId" clId="{F5FA52D0-9AA9-4A58-8DD5-5B5C33A3442F}" dt="2026-04-05T07:56:07.617" v="1128" actId="478"/>
-          <ac:picMkLst>
-            <pc:docMk/>
-            <pc:sldMk cId="3592627706" sldId="565"/>
-            <ac:picMk id="13" creationId="{FA8CBF28-DE26-C845-B448-2105CEDDB5E4}"/>
-          </ac:picMkLst>
-        </pc:picChg>
       </pc:sldChg>
     </pc:docChg>
   </pc:docChgLst>
@@ -821,7 +481,7 @@
           <a:p>
             <a:fld id="{19290499-B0E0-4FC3-9F45-28EC0C2DBC71}" type="datetimeFigureOut">
               <a:rPr lang="ko-KR" altLang="en-US" smtClean="0"/>
-              <a:t>2026-04-06</a:t>
+              <a:t>2026-04-07</a:t>
             </a:fld>
             <a:endParaRPr lang="ko-KR" altLang="en-US"/>
           </a:p>
@@ -1235,7 +895,7 @@
           <a:p>
             <a:fld id="{42F764F9-9D84-42D1-B002-3633BC0ECDE6}" type="datetimeFigureOut">
               <a:rPr lang="ko-KR" altLang="en-US" smtClean="0"/>
-              <a:t>2026-04-06</a:t>
+              <a:t>2026-04-07</a:t>
             </a:fld>
             <a:endParaRPr lang="ko-KR" altLang="en-US"/>
           </a:p>
@@ -1433,7 +1093,7 @@
           <a:p>
             <a:fld id="{42F764F9-9D84-42D1-B002-3633BC0ECDE6}" type="datetimeFigureOut">
               <a:rPr lang="ko-KR" altLang="en-US" smtClean="0"/>
-              <a:t>2026-04-06</a:t>
+              <a:t>2026-04-07</a:t>
             </a:fld>
             <a:endParaRPr lang="ko-KR" altLang="en-US"/>
           </a:p>
@@ -1641,7 +1301,7 @@
           <a:p>
             <a:fld id="{42F764F9-9D84-42D1-B002-3633BC0ECDE6}" type="datetimeFigureOut">
               <a:rPr lang="ko-KR" altLang="en-US" smtClean="0"/>
-              <a:t>2026-04-06</a:t>
+              <a:t>2026-04-07</a:t>
             </a:fld>
             <a:endParaRPr lang="ko-KR" altLang="en-US"/>
           </a:p>
@@ -1839,7 +1499,7 @@
           <a:p>
             <a:fld id="{42F764F9-9D84-42D1-B002-3633BC0ECDE6}" type="datetimeFigureOut">
               <a:rPr lang="ko-KR" altLang="en-US" smtClean="0"/>
-              <a:t>2026-04-06</a:t>
+              <a:t>2026-04-07</a:t>
             </a:fld>
             <a:endParaRPr lang="ko-KR" altLang="en-US"/>
           </a:p>
@@ -2114,7 +1774,7 @@
           <a:p>
             <a:fld id="{42F764F9-9D84-42D1-B002-3633BC0ECDE6}" type="datetimeFigureOut">
               <a:rPr lang="ko-KR" altLang="en-US" smtClean="0"/>
-              <a:t>2026-04-06</a:t>
+              <a:t>2026-04-07</a:t>
             </a:fld>
             <a:endParaRPr lang="ko-KR" altLang="en-US"/>
           </a:p>
@@ -2379,7 +2039,7 @@
           <a:p>
             <a:fld id="{42F764F9-9D84-42D1-B002-3633BC0ECDE6}" type="datetimeFigureOut">
               <a:rPr lang="ko-KR" altLang="en-US" smtClean="0"/>
-              <a:t>2026-04-06</a:t>
+              <a:t>2026-04-07</a:t>
             </a:fld>
             <a:endParaRPr lang="ko-KR" altLang="en-US"/>
           </a:p>
@@ -2791,7 +2451,7 @@
           <a:p>
             <a:fld id="{42F764F9-9D84-42D1-B002-3633BC0ECDE6}" type="datetimeFigureOut">
               <a:rPr lang="ko-KR" altLang="en-US" smtClean="0"/>
-              <a:t>2026-04-06</a:t>
+              <a:t>2026-04-07</a:t>
             </a:fld>
             <a:endParaRPr lang="ko-KR" altLang="en-US"/>
           </a:p>
@@ -2932,7 +2592,7 @@
           <a:p>
             <a:fld id="{42F764F9-9D84-42D1-B002-3633BC0ECDE6}" type="datetimeFigureOut">
               <a:rPr lang="ko-KR" altLang="en-US" smtClean="0"/>
-              <a:t>2026-04-06</a:t>
+              <a:t>2026-04-07</a:t>
             </a:fld>
             <a:endParaRPr lang="ko-KR" altLang="en-US"/>
           </a:p>
@@ -3045,7 +2705,7 @@
           <a:p>
             <a:fld id="{42F764F9-9D84-42D1-B002-3633BC0ECDE6}" type="datetimeFigureOut">
               <a:rPr lang="ko-KR" altLang="en-US" smtClean="0"/>
-              <a:t>2026-04-06</a:t>
+              <a:t>2026-04-07</a:t>
             </a:fld>
             <a:endParaRPr lang="ko-KR" altLang="en-US"/>
           </a:p>
@@ -3356,7 +3016,7 @@
           <a:p>
             <a:fld id="{42F764F9-9D84-42D1-B002-3633BC0ECDE6}" type="datetimeFigureOut">
               <a:rPr lang="ko-KR" altLang="en-US" smtClean="0"/>
-              <a:t>2026-04-06</a:t>
+              <a:t>2026-04-07</a:t>
             </a:fld>
             <a:endParaRPr lang="ko-KR" altLang="en-US"/>
           </a:p>
@@ -3644,7 +3304,7 @@
           <a:p>
             <a:fld id="{42F764F9-9D84-42D1-B002-3633BC0ECDE6}" type="datetimeFigureOut">
               <a:rPr lang="ko-KR" altLang="en-US" smtClean="0"/>
-              <a:t>2026-04-06</a:t>
+              <a:t>2026-04-07</a:t>
             </a:fld>
             <a:endParaRPr lang="ko-KR" altLang="en-US"/>
           </a:p>
@@ -3885,7 +3545,7 @@
           <a:p>
             <a:fld id="{42F764F9-9D84-42D1-B002-3633BC0ECDE6}" type="datetimeFigureOut">
               <a:rPr lang="ko-KR" altLang="en-US" smtClean="0"/>
-              <a:t>2026-04-06</a:t>
+              <a:t>2026-04-07</a:t>
             </a:fld>
             <a:endParaRPr lang="ko-KR" altLang="en-US"/>
           </a:p>
@@ -4536,7 +4196,7 @@
         </p:blipFill>
         <p:spPr>
           <a:xfrm>
-            <a:off x="1158933" y="1453015"/>
+            <a:off x="1395999" y="775681"/>
             <a:ext cx="9874134" cy="4212042"/>
           </a:xfrm>
           <a:prstGeom prst="rect">
@@ -4544,6 +4204,97 @@
           </a:prstGeom>
         </p:spPr>
       </p:pic>
+      <p:sp>
+        <p:nvSpPr>
+          <p:cNvPr id="2" name="TextBox 1">
+            <a:extLst>
+              <a:ext uri="{FF2B5EF4-FFF2-40B4-BE49-F238E27FC236}">
+                <a16:creationId xmlns:a16="http://schemas.microsoft.com/office/drawing/2014/main" id="{F8FAEC7C-67E3-5707-1BA6-78EA3225ED61}"/>
+              </a:ext>
+            </a:extLst>
+          </p:cNvPr>
+          <p:cNvSpPr txBox="1"/>
+          <p:nvPr/>
+        </p:nvSpPr>
+        <p:spPr>
+          <a:xfrm>
+            <a:off x="4129769" y="5172555"/>
+            <a:ext cx="3932462" cy="369332"/>
+          </a:xfrm>
+          <a:prstGeom prst="rect">
+            <a:avLst/>
+          </a:prstGeom>
+          <a:noFill/>
+        </p:spPr>
+        <p:txBody>
+          <a:bodyPr wrap="square" rtlCol="0">
+            <a:spAutoFit/>
+          </a:bodyPr>
+          <a:lstStyle/>
+          <a:p>
+            <a:pPr algn="ctr"/>
+            <a:r>
+              <a:rPr lang="en-US" altLang="ko-KR" dirty="0"/>
+              <a:t>Published : 2025.07.17</a:t>
+            </a:r>
+            <a:endParaRPr lang="ko-KR" altLang="en-US" dirty="0"/>
+          </a:p>
+        </p:txBody>
+      </p:sp>
+      <p:sp>
+        <p:nvSpPr>
+          <p:cNvPr id="4" name="TextBox 3">
+            <a:extLst>
+              <a:ext uri="{FF2B5EF4-FFF2-40B4-BE49-F238E27FC236}">
+                <a16:creationId xmlns:a16="http://schemas.microsoft.com/office/drawing/2014/main" id="{66C317EC-CECD-7151-4EE6-02CD47427FC9}"/>
+              </a:ext>
+            </a:extLst>
+          </p:cNvPr>
+          <p:cNvSpPr txBox="1"/>
+          <p:nvPr/>
+        </p:nvSpPr>
+        <p:spPr>
+          <a:xfrm>
+            <a:off x="2819400" y="5759153"/>
+            <a:ext cx="6553200" cy="646331"/>
+          </a:xfrm>
+          <a:prstGeom prst="rect">
+            <a:avLst/>
+          </a:prstGeom>
+          <a:noFill/>
+        </p:spPr>
+        <p:txBody>
+          <a:bodyPr wrap="square">
+            <a:spAutoFit/>
+          </a:bodyPr>
+          <a:lstStyle/>
+          <a:p>
+            <a:pPr algn="ctr"/>
+            <a:r>
+              <a:rPr lang="en-US" altLang="ko-KR" dirty="0">
+                <a:sym typeface="Wingdings" panose="05000000000000000000" pitchFamily="2" charset="2"/>
+              </a:rPr>
+              <a:t> </a:t>
+            </a:r>
+            <a:r>
+              <a:rPr lang="en-US" altLang="ko-KR" dirty="0"/>
+              <a:t>LLM </a:t>
+            </a:r>
+            <a:r>
+              <a:rPr lang="ko-KR" altLang="en-US" dirty="0"/>
+              <a:t>기반 </a:t>
+            </a:r>
+            <a:r>
+              <a:rPr lang="en-US" altLang="ko-KR" dirty="0"/>
+              <a:t>feature engineering</a:t>
+            </a:r>
+            <a:r>
+              <a:rPr lang="ko-KR" altLang="en-US" dirty="0"/>
+              <a:t>을 활용한 의료 추천 시스템제안</a:t>
+            </a:r>
+          </a:p>
+        </p:txBody>
+      </p:sp>
     </p:spTree>
     <p:extLst>
       <p:ext uri="{BB962C8B-B14F-4D97-AF65-F5344CB8AC3E}">
@@ -5947,8 +5698,8 @@
         </p:nvSpPr>
         <p:spPr>
           <a:xfrm>
-            <a:off x="305273" y="5116475"/>
-            <a:ext cx="11522075" cy="1200329"/>
+            <a:off x="305273" y="5223181"/>
+            <a:ext cx="11522075" cy="923330"/>
           </a:xfrm>
           <a:prstGeom prst="rect">
             <a:avLst/>
@@ -5966,53 +5717,39 @@
               <a:buChar char="v"/>
             </a:pPr>
             <a:r>
+              <a:rPr lang="en-US" altLang="ko-KR">
+                <a:latin typeface="나눔고딕" panose="020D0604000000000000" pitchFamily="50" charset="-127"/>
+                <a:ea typeface="나눔고딕" panose="020D0604000000000000" pitchFamily="50" charset="-127"/>
+              </a:rPr>
+              <a:t>Data : </a:t>
+            </a:r>
+            <a:r>
+              <a:rPr lang="ko-KR" altLang="en-US">
+                <a:latin typeface="나눔고딕" panose="020D0604000000000000" pitchFamily="50" charset="-127"/>
+                <a:ea typeface="나눔고딕" panose="020D0604000000000000" pitchFamily="50" charset="-127"/>
+              </a:rPr>
+              <a:t>사용자가 </a:t>
+            </a:r>
+            <a:r>
+              <a:rPr lang="ko-KR" altLang="en-US" dirty="0">
+                <a:latin typeface="나눔고딕" panose="020D0604000000000000" pitchFamily="50" charset="-127"/>
+                <a:ea typeface="나눔고딕" panose="020D0604000000000000" pitchFamily="50" charset="-127"/>
+              </a:rPr>
+              <a:t>남긴 실제 리뷰와 평점</a:t>
+            </a:r>
+            <a:r>
               <a:rPr lang="en-US" altLang="ko-KR" dirty="0">
                 <a:latin typeface="나눔고딕" panose="020D0604000000000000" pitchFamily="50" charset="-127"/>
                 <a:ea typeface="나눔고딕" panose="020D0604000000000000" pitchFamily="50" charset="-127"/>
               </a:rPr>
-              <a:t>Initial NLP Process : </a:t>
+              <a:t>, </a:t>
             </a:r>
             <a:r>
               <a:rPr lang="ko-KR" altLang="en-US" dirty="0">
                 <a:latin typeface="나눔고딕" panose="020D0604000000000000" pitchFamily="50" charset="-127"/>
                 <a:ea typeface="나눔고딕" panose="020D0604000000000000" pitchFamily="50" charset="-127"/>
               </a:rPr>
-              <a:t>사용자의 쿼리나 리뷰 텍스트에서 시간</a:t>
-            </a:r>
-            <a:r>
-              <a:rPr lang="en-US" altLang="ko-KR" dirty="0">
-                <a:latin typeface="나눔고딕" panose="020D0604000000000000" pitchFamily="50" charset="-127"/>
-                <a:ea typeface="나눔고딕" panose="020D0604000000000000" pitchFamily="50" charset="-127"/>
-              </a:rPr>
-              <a:t>, </a:t>
-            </a:r>
-            <a:r>
-              <a:rPr lang="ko-KR" altLang="en-US" dirty="0">
-                <a:latin typeface="나눔고딕" panose="020D0604000000000000" pitchFamily="50" charset="-127"/>
-                <a:ea typeface="나눔고딕" panose="020D0604000000000000" pitchFamily="50" charset="-127"/>
-              </a:rPr>
-              <a:t>장소</a:t>
-            </a:r>
-            <a:r>
-              <a:rPr lang="en-US" altLang="ko-KR" dirty="0">
-                <a:latin typeface="나눔고딕" panose="020D0604000000000000" pitchFamily="50" charset="-127"/>
-                <a:ea typeface="나눔고딕" panose="020D0604000000000000" pitchFamily="50" charset="-127"/>
-              </a:rPr>
-              <a:t>, </a:t>
-            </a:r>
-            <a:r>
-              <a:rPr lang="ko-KR" altLang="en-US" dirty="0" err="1">
-                <a:latin typeface="나눔고딕" panose="020D0604000000000000" pitchFamily="50" charset="-127"/>
-                <a:ea typeface="나눔고딕" panose="020D0604000000000000" pitchFamily="50" charset="-127"/>
-              </a:rPr>
-              <a:t>증상등</a:t>
-            </a:r>
-            <a:r>
-              <a:rPr lang="ko-KR" altLang="en-US" dirty="0">
-                <a:latin typeface="나눔고딕" panose="020D0604000000000000" pitchFamily="50" charset="-127"/>
-                <a:ea typeface="나눔고딕" panose="020D0604000000000000" pitchFamily="50" charset="-127"/>
-              </a:rPr>
-              <a:t> 핵심 파라미터 추출</a:t>
+              <a:t>그리고 다른 사람들이 그 리뷰를 얼마나 유용하다고 봤는지 포함</a:t>
             </a:r>
             <a:endParaRPr lang="en-US" altLang="ko-KR" dirty="0">
               <a:latin typeface="나눔고딕" panose="020D0604000000000000" pitchFamily="50" charset="-127"/>
@@ -6029,28 +5766,56 @@
                 <a:latin typeface="나눔고딕" panose="020D0604000000000000" pitchFamily="50" charset="-127"/>
                 <a:ea typeface="나눔고딕" panose="020D0604000000000000" pitchFamily="50" charset="-127"/>
               </a:rPr>
-              <a:t>LLM-based Feature Engineering : LLM</a:t>
+              <a:t>Sentiment analysis : </a:t>
             </a:r>
             <a:r>
               <a:rPr lang="ko-KR" altLang="en-US" dirty="0">
                 <a:latin typeface="나눔고딕" panose="020D0604000000000000" pitchFamily="50" charset="-127"/>
                 <a:ea typeface="나눔고딕" panose="020D0604000000000000" pitchFamily="50" charset="-127"/>
               </a:rPr>
-              <a:t>이 비정형 텍스트를 분석하여 </a:t>
-            </a:r>
-            <a:r>
-              <a:rPr lang="ko-KR" altLang="en-US" dirty="0" err="1">
-                <a:latin typeface="나눔고딕" panose="020D0604000000000000" pitchFamily="50" charset="-127"/>
-                <a:ea typeface="나눔고딕" panose="020D0604000000000000" pitchFamily="50" charset="-127"/>
-              </a:rPr>
-              <a:t>수치화된</a:t>
+              <a:t>그 리뷰가 긍정적인지</a:t>
+            </a:r>
+            <a:r>
+              <a:rPr lang="en-US" altLang="ko-KR" dirty="0">
+                <a:latin typeface="나눔고딕" panose="020D0604000000000000" pitchFamily="50" charset="-127"/>
+                <a:ea typeface="나눔고딕" panose="020D0604000000000000" pitchFamily="50" charset="-127"/>
+              </a:rPr>
+              <a:t>, </a:t>
             </a:r>
             <a:r>
               <a:rPr lang="ko-KR" altLang="en-US" dirty="0">
                 <a:latin typeface="나눔고딕" panose="020D0604000000000000" pitchFamily="50" charset="-127"/>
                 <a:ea typeface="나눔고딕" panose="020D0604000000000000" pitchFamily="50" charset="-127"/>
               </a:rPr>
-              <a:t> 감성 점수 및 맥락 정보를 생성</a:t>
+              <a:t>부정적인지</a:t>
+            </a:r>
+            <a:r>
+              <a:rPr lang="en-US" altLang="ko-KR" dirty="0">
+                <a:latin typeface="나눔고딕" panose="020D0604000000000000" pitchFamily="50" charset="-127"/>
+                <a:ea typeface="나눔고딕" panose="020D0604000000000000" pitchFamily="50" charset="-127"/>
+              </a:rPr>
+              <a:t>, </a:t>
+            </a:r>
+            <a:r>
+              <a:rPr lang="ko-KR" altLang="en-US" dirty="0">
+                <a:latin typeface="나눔고딕" panose="020D0604000000000000" pitchFamily="50" charset="-127"/>
+                <a:ea typeface="나눔고딕" panose="020D0604000000000000" pitchFamily="50" charset="-127"/>
+              </a:rPr>
+              <a:t>혹은 얼마나 좋은 반응</a:t>
+            </a:r>
+            <a:r>
+              <a:rPr lang="en-US" altLang="ko-KR" dirty="0">
+                <a:latin typeface="나눔고딕" panose="020D0604000000000000" pitchFamily="50" charset="-127"/>
+                <a:ea typeface="나눔고딕" panose="020D0604000000000000" pitchFamily="50" charset="-127"/>
+              </a:rPr>
+              <a:t>/</a:t>
+            </a:r>
+            <a:r>
+              <a:rPr lang="ko-KR" altLang="en-US" dirty="0">
+                <a:latin typeface="나눔고딕" panose="020D0604000000000000" pitchFamily="50" charset="-127"/>
+                <a:ea typeface="나눔고딕" panose="020D0604000000000000" pitchFamily="50" charset="-127"/>
+              </a:rPr>
+              <a:t>나쁜 반응을 담고 있는지</a:t>
             </a:r>
             <a:endParaRPr lang="en-US" altLang="ko-KR" dirty="0">
               <a:latin typeface="나눔고딕" panose="020D0604000000000000" pitchFamily="50" charset="-127"/>
@@ -6067,28 +5832,14 @@
                 <a:latin typeface="나눔고딕" panose="020D0604000000000000" pitchFamily="50" charset="-127"/>
                 <a:ea typeface="나눔고딕" panose="020D0604000000000000" pitchFamily="50" charset="-127"/>
               </a:rPr>
-              <a:t>Physics-Informed Neural Network : </a:t>
+              <a:t>Weighted model prediction : </a:t>
             </a:r>
             <a:r>
               <a:rPr lang="ko-KR" altLang="en-US" dirty="0">
                 <a:latin typeface="나눔고딕" panose="020D0604000000000000" pitchFamily="50" charset="-127"/>
                 <a:ea typeface="나눔고딕" panose="020D0604000000000000" pitchFamily="50" charset="-127"/>
               </a:rPr>
-              <a:t>물리적 법칙과 </a:t>
-            </a:r>
-            <a:r>
-              <a:rPr lang="en-US" altLang="ko-KR" dirty="0">
-                <a:latin typeface="나눔고딕" panose="020D0604000000000000" pitchFamily="50" charset="-127"/>
-                <a:ea typeface="나눔고딕" panose="020D0604000000000000" pitchFamily="50" charset="-127"/>
-              </a:rPr>
-              <a:t>LLM </a:t>
-            </a:r>
-            <a:r>
-              <a:rPr lang="ko-KR" altLang="en-US" dirty="0">
-                <a:latin typeface="나눔고딕" panose="020D0604000000000000" pitchFamily="50" charset="-127"/>
-                <a:ea typeface="나눔고딕" panose="020D0604000000000000" pitchFamily="50" charset="-127"/>
-              </a:rPr>
-              <a:t>추출 특징을 결합하여 데이터의 일관성 유지 및 정확한 상태 추정</a:t>
+              <a:t>더 신뢰할 수 있는 모델 결과에 더 큰 비중</a:t>
             </a:r>
             <a:endParaRPr lang="en-US" altLang="ko-KR" dirty="0">
               <a:latin typeface="나눔고딕" panose="020D0604000000000000" pitchFamily="50" charset="-127"/>
@@ -6127,6 +5878,735 @@
           </a:prstGeom>
         </p:spPr>
       </p:pic>
+      <p:sp>
+        <p:nvSpPr>
+          <p:cNvPr id="2" name="화살표: 오른쪽 1">
+            <a:extLst>
+              <a:ext uri="{FF2B5EF4-FFF2-40B4-BE49-F238E27FC236}">
+                <a16:creationId xmlns:a16="http://schemas.microsoft.com/office/drawing/2014/main" id="{66D06C91-6FE0-E52A-3BC3-2D66E41BE464}"/>
+              </a:ext>
+            </a:extLst>
+          </p:cNvPr>
+          <p:cNvSpPr/>
+          <p:nvPr/>
+        </p:nvSpPr>
+        <p:spPr>
+          <a:xfrm>
+            <a:off x="8365976" y="1990012"/>
+            <a:ext cx="435429" cy="304800"/>
+          </a:xfrm>
+          <a:prstGeom prst="rightArrow">
+            <a:avLst/>
+          </a:prstGeom>
+          <a:solidFill>
+            <a:schemeClr val="tx1"/>
+          </a:solidFill>
+          <a:ln>
+            <a:noFill/>
+          </a:ln>
+        </p:spPr>
+        <p:style>
+          <a:lnRef idx="2">
+            <a:schemeClr val="accent1">
+              <a:shade val="15000"/>
+            </a:schemeClr>
+          </a:lnRef>
+          <a:fillRef idx="1">
+            <a:schemeClr val="accent1"/>
+          </a:fillRef>
+          <a:effectRef idx="0">
+            <a:schemeClr val="accent1"/>
+          </a:effectRef>
+          <a:fontRef idx="minor">
+            <a:schemeClr val="lt1"/>
+          </a:fontRef>
+        </p:style>
+        <p:txBody>
+          <a:bodyPr rtlCol="0" anchor="ctr"/>
+          <a:lstStyle/>
+          <a:p>
+            <a:pPr algn="ctr"/>
+            <a:endParaRPr lang="ko-KR" altLang="en-US"/>
+          </a:p>
+        </p:txBody>
+      </p:sp>
+      <p:sp>
+        <p:nvSpPr>
+          <p:cNvPr id="3" name="TextBox 2">
+            <a:extLst>
+              <a:ext uri="{FF2B5EF4-FFF2-40B4-BE49-F238E27FC236}">
+                <a16:creationId xmlns:a16="http://schemas.microsoft.com/office/drawing/2014/main" id="{FF89289B-8C05-6311-B097-911453314BE6}"/>
+              </a:ext>
+            </a:extLst>
+          </p:cNvPr>
+          <p:cNvSpPr txBox="1"/>
+          <p:nvPr/>
+        </p:nvSpPr>
+        <p:spPr>
+          <a:xfrm>
+            <a:off x="8801405" y="1957746"/>
+            <a:ext cx="2532744" cy="369332"/>
+          </a:xfrm>
+          <a:prstGeom prst="rect">
+            <a:avLst/>
+          </a:prstGeom>
+          <a:noFill/>
+        </p:spPr>
+        <p:txBody>
+          <a:bodyPr wrap="square" rtlCol="0">
+            <a:spAutoFit/>
+          </a:bodyPr>
+          <a:lstStyle/>
+          <a:p>
+            <a:r>
+              <a:rPr lang="en-US" altLang="ko-KR" dirty="0"/>
+              <a:t>LLaMa-3.2-3B-Instruct</a:t>
+            </a:r>
+            <a:endParaRPr lang="ko-KR" altLang="en-US" dirty="0"/>
+          </a:p>
+        </p:txBody>
+      </p:sp>
+      <p:sp>
+        <p:nvSpPr>
+          <p:cNvPr id="8" name="화살표: 오른쪽 7">
+            <a:extLst>
+              <a:ext uri="{FF2B5EF4-FFF2-40B4-BE49-F238E27FC236}">
+                <a16:creationId xmlns:a16="http://schemas.microsoft.com/office/drawing/2014/main" id="{BEBD2ECE-E994-1DCE-D3BD-CC6B5C454CD3}"/>
+              </a:ext>
+            </a:extLst>
+          </p:cNvPr>
+          <p:cNvSpPr/>
+          <p:nvPr/>
+        </p:nvSpPr>
+        <p:spPr>
+          <a:xfrm>
+            <a:off x="8148261" y="2568449"/>
+            <a:ext cx="435429" cy="304800"/>
+          </a:xfrm>
+          <a:prstGeom prst="rightArrow">
+            <a:avLst/>
+          </a:prstGeom>
+          <a:solidFill>
+            <a:schemeClr val="tx1"/>
+          </a:solidFill>
+          <a:ln>
+            <a:noFill/>
+          </a:ln>
+        </p:spPr>
+        <p:style>
+          <a:lnRef idx="2">
+            <a:schemeClr val="accent1">
+              <a:shade val="15000"/>
+            </a:schemeClr>
+          </a:lnRef>
+          <a:fillRef idx="1">
+            <a:schemeClr val="accent1"/>
+          </a:fillRef>
+          <a:effectRef idx="0">
+            <a:schemeClr val="accent1"/>
+          </a:effectRef>
+          <a:fontRef idx="minor">
+            <a:schemeClr val="lt1"/>
+          </a:fontRef>
+        </p:style>
+        <p:txBody>
+          <a:bodyPr rtlCol="0" anchor="ctr"/>
+          <a:lstStyle/>
+          <a:p>
+            <a:pPr algn="ctr"/>
+            <a:endParaRPr lang="ko-KR" altLang="en-US"/>
+          </a:p>
+        </p:txBody>
+      </p:sp>
+      <p:sp>
+        <p:nvSpPr>
+          <p:cNvPr id="9" name="TextBox 8">
+            <a:extLst>
+              <a:ext uri="{FF2B5EF4-FFF2-40B4-BE49-F238E27FC236}">
+                <a16:creationId xmlns:a16="http://schemas.microsoft.com/office/drawing/2014/main" id="{04FA8CE5-6744-1823-7CD7-C692178CFDD9}"/>
+              </a:ext>
+            </a:extLst>
+          </p:cNvPr>
+          <p:cNvSpPr txBox="1"/>
+          <p:nvPr/>
+        </p:nvSpPr>
+        <p:spPr>
+          <a:xfrm>
+            <a:off x="8583689" y="2503917"/>
+            <a:ext cx="2750459" cy="369332"/>
+          </a:xfrm>
+          <a:prstGeom prst="rect">
+            <a:avLst/>
+          </a:prstGeom>
+          <a:noFill/>
+        </p:spPr>
+        <p:txBody>
+          <a:bodyPr wrap="square" rtlCol="0">
+            <a:spAutoFit/>
+          </a:bodyPr>
+          <a:lstStyle/>
+          <a:p>
+            <a:r>
+              <a:rPr lang="en-US" altLang="ko-KR" dirty="0"/>
+              <a:t>LLM2Vec(Mistral-7B</a:t>
+            </a:r>
+            <a:r>
+              <a:rPr lang="ko-KR" altLang="en-US" dirty="0"/>
+              <a:t>기반</a:t>
+            </a:r>
+            <a:r>
+              <a:rPr lang="en-US" altLang="ko-KR" dirty="0"/>
+              <a:t>)</a:t>
+            </a:r>
+            <a:endParaRPr lang="ko-KR" altLang="en-US" dirty="0"/>
+          </a:p>
+        </p:txBody>
+      </p:sp>
+      <p:sp>
+        <p:nvSpPr>
+          <p:cNvPr id="13" name="TextBox 12">
+            <a:extLst>
+              <a:ext uri="{FF2B5EF4-FFF2-40B4-BE49-F238E27FC236}">
+                <a16:creationId xmlns:a16="http://schemas.microsoft.com/office/drawing/2014/main" id="{A803D1F1-426E-1B58-57D8-60CA01668FA3}"/>
+              </a:ext>
+            </a:extLst>
+          </p:cNvPr>
+          <p:cNvSpPr txBox="1"/>
+          <p:nvPr/>
+        </p:nvSpPr>
+        <p:spPr>
+          <a:xfrm>
+            <a:off x="4860589" y="3290500"/>
+            <a:ext cx="1728898" cy="276999"/>
+          </a:xfrm>
+          <a:prstGeom prst="rect">
+            <a:avLst/>
+          </a:prstGeom>
+          <a:noFill/>
+        </p:spPr>
+        <p:txBody>
+          <a:bodyPr wrap="square" rtlCol="0">
+            <a:spAutoFit/>
+          </a:bodyPr>
+          <a:lstStyle/>
+          <a:p>
+            <a:r>
+              <a:rPr lang="ko-KR" altLang="en-US" sz="1200" dirty="0"/>
+              <a:t>사회적 신뢰 반영</a:t>
+            </a:r>
+          </a:p>
+        </p:txBody>
+      </p:sp>
+      <p:sp>
+        <p:nvSpPr>
+          <p:cNvPr id="15" name="Rectangle 1">
+            <a:extLst>
+              <a:ext uri="{FF2B5EF4-FFF2-40B4-BE49-F238E27FC236}">
+                <a16:creationId xmlns:a16="http://schemas.microsoft.com/office/drawing/2014/main" id="{0A5702CA-708A-2CDA-F764-12E939C847B9}"/>
+              </a:ext>
+            </a:extLst>
+          </p:cNvPr>
+          <p:cNvSpPr>
+            <a:spLocks noChangeArrowheads="1"/>
+          </p:cNvSpPr>
+          <p:nvPr/>
+        </p:nvSpPr>
+        <p:spPr bwMode="auto">
+          <a:xfrm>
+            <a:off x="6887409" y="4139460"/>
+            <a:ext cx="3827992" cy="784830"/>
+          </a:xfrm>
+          <a:prstGeom prst="rect">
+            <a:avLst/>
+          </a:prstGeom>
+          <a:noFill/>
+          <a:ln>
+            <a:noFill/>
+          </a:ln>
+          <a:effectLst/>
+          <a:extLst>
+            <a:ext uri="{909E8E84-426E-40DD-AFC4-6F175D3DCCD1}">
+              <a14:hiddenFill xmlns:a14="http://schemas.microsoft.com/office/drawing/2010/main">
+                <a:solidFill>
+                  <a:schemeClr val="accent1"/>
+                </a:solidFill>
+              </a14:hiddenFill>
+            </a:ext>
+            <a:ext uri="{91240B29-F687-4F45-9708-019B960494DF}">
+              <a14:hiddenLine xmlns:a14="http://schemas.microsoft.com/office/drawing/2010/main" w="9525">
+                <a:solidFill>
+                  <a:schemeClr val="tx1"/>
+                </a:solidFill>
+                <a:miter lim="800000"/>
+                <a:headEnd/>
+                <a:tailEnd/>
+              </a14:hiddenLine>
+            </a:ext>
+            <a:ext uri="{AF507438-7753-43E0-B8FC-AC1667EBCBE1}">
+              <a14:hiddenEffects xmlns:a14="http://schemas.microsoft.com/office/drawing/2010/main">
+                <a:effectLst>
+                  <a:outerShdw dist="35921" dir="2700000" algn="ctr" rotWithShape="0">
+                    <a:schemeClr val="bg2"/>
+                  </a:outerShdw>
+                </a:effectLst>
+              </a14:hiddenEffects>
+            </a:ext>
+          </a:extLst>
+        </p:spPr>
+        <p:txBody>
+          <a:bodyPr vert="horz" wrap="square" lIns="91440" tIns="45720" rIns="91440" bIns="45720" numCol="1" anchor="ctr" anchorCtr="0" compatLnSpc="1">
+            <a:prstTxWarp prst="textNoShape">
+              <a:avLst/>
+            </a:prstTxWarp>
+            <a:spAutoFit/>
+          </a:bodyPr>
+          <a:lstStyle/>
+          <a:p>
+            <a:pPr lvl="0" eaLnBrk="0" fontAlgn="base" latinLnBrk="0" hangingPunct="0">
+              <a:spcBef>
+                <a:spcPct val="0"/>
+              </a:spcBef>
+              <a:spcAft>
+                <a:spcPct val="0"/>
+              </a:spcAft>
+            </a:pPr>
+            <a:r>
+              <a:rPr lang="en-US" altLang="ko-KR" sz="1500" dirty="0">
+                <a:latin typeface="Arial" panose="020B0604020202020204" pitchFamily="34" charset="0"/>
+              </a:rPr>
+              <a:t>Final Score =</a:t>
+            </a:r>
+          </a:p>
+          <a:p>
+            <a:pPr lvl="0" eaLnBrk="0" fontAlgn="base" latinLnBrk="0" hangingPunct="0">
+              <a:spcBef>
+                <a:spcPct val="0"/>
+              </a:spcBef>
+              <a:spcAft>
+                <a:spcPct val="0"/>
+              </a:spcAft>
+            </a:pPr>
+            <a:r>
+              <a:rPr lang="en-US" altLang="ko-KR" sz="1500" dirty="0">
+                <a:latin typeface="Arial" panose="020B0604020202020204" pitchFamily="34" charset="0"/>
+              </a:rPr>
+              <a:t>   Sentiment Prediction(</a:t>
+            </a:r>
+            <a:r>
+              <a:rPr lang="ko-KR" altLang="en-US" sz="1500" dirty="0">
+                <a:latin typeface="Arial" panose="020B0604020202020204" pitchFamily="34" charset="0"/>
+              </a:rPr>
+              <a:t>리뷰 긍정</a:t>
+            </a:r>
+            <a:r>
+              <a:rPr lang="en-US" altLang="ko-KR" sz="1500" dirty="0">
+                <a:latin typeface="Arial" panose="020B0604020202020204" pitchFamily="34" charset="0"/>
+              </a:rPr>
+              <a:t>/</a:t>
+            </a:r>
+            <a:r>
+              <a:rPr lang="ko-KR" altLang="en-US" sz="1500" dirty="0">
+                <a:latin typeface="Arial" panose="020B0604020202020204" pitchFamily="34" charset="0"/>
+              </a:rPr>
+              <a:t>부정 예측</a:t>
+            </a:r>
+            <a:r>
+              <a:rPr lang="en-US" altLang="ko-KR" sz="1500" dirty="0">
+                <a:latin typeface="Arial" panose="020B0604020202020204" pitchFamily="34" charset="0"/>
+              </a:rPr>
+              <a:t> + Social Validation(</a:t>
+            </a:r>
+            <a:r>
+              <a:rPr lang="ko-KR" altLang="en-US" sz="1500" dirty="0">
+                <a:latin typeface="Arial" panose="020B0604020202020204" pitchFamily="34" charset="0"/>
+              </a:rPr>
+              <a:t>사용자 추천</a:t>
+            </a:r>
+            <a:r>
+              <a:rPr lang="en-US" altLang="ko-KR" sz="1500" dirty="0">
+                <a:latin typeface="Arial" panose="020B0604020202020204" pitchFamily="34" charset="0"/>
+              </a:rPr>
+              <a:t>)</a:t>
+            </a:r>
+            <a:endParaRPr kumimoji="0" lang="ko-KR" altLang="ko-KR" sz="1500" b="0" i="0" u="none" strike="noStrike" cap="none" normalizeH="0" baseline="0" dirty="0">
+              <a:ln>
+                <a:noFill/>
+              </a:ln>
+              <a:solidFill>
+                <a:schemeClr val="tx1"/>
+              </a:solidFill>
+              <a:effectLst/>
+              <a:latin typeface="Arial" panose="020B0604020202020204" pitchFamily="34" charset="0"/>
+            </a:endParaRPr>
+          </a:p>
+        </p:txBody>
+      </p:sp>
+      <p:sp>
+        <p:nvSpPr>
+          <p:cNvPr id="16" name="Rectangle 2">
+            <a:extLst>
+              <a:ext uri="{FF2B5EF4-FFF2-40B4-BE49-F238E27FC236}">
+                <a16:creationId xmlns:a16="http://schemas.microsoft.com/office/drawing/2014/main" id="{8500A83C-0448-B984-F055-EE5BD5F6E286}"/>
+              </a:ext>
+            </a:extLst>
+          </p:cNvPr>
+          <p:cNvSpPr>
+            <a:spLocks noChangeArrowheads="1"/>
+          </p:cNvSpPr>
+          <p:nvPr/>
+        </p:nvSpPr>
+        <p:spPr bwMode="auto">
+          <a:xfrm>
+            <a:off x="371475" y="3271502"/>
+            <a:ext cx="1728898" cy="1754326"/>
+          </a:xfrm>
+          <a:prstGeom prst="rect">
+            <a:avLst/>
+          </a:prstGeom>
+          <a:noFill/>
+          <a:ln>
+            <a:noFill/>
+          </a:ln>
+          <a:effectLst/>
+          <a:extLst>
+            <a:ext uri="{909E8E84-426E-40DD-AFC4-6F175D3DCCD1}">
+              <a14:hiddenFill xmlns:a14="http://schemas.microsoft.com/office/drawing/2010/main">
+                <a:solidFill>
+                  <a:schemeClr val="accent1"/>
+                </a:solidFill>
+              </a14:hiddenFill>
+            </a:ext>
+            <a:ext uri="{91240B29-F687-4F45-9708-019B960494DF}">
+              <a14:hiddenLine xmlns:a14="http://schemas.microsoft.com/office/drawing/2010/main" w="9525">
+                <a:solidFill>
+                  <a:schemeClr val="tx1"/>
+                </a:solidFill>
+                <a:miter lim="800000"/>
+                <a:headEnd/>
+                <a:tailEnd/>
+              </a14:hiddenLine>
+            </a:ext>
+            <a:ext uri="{AF507438-7753-43E0-B8FC-AC1667EBCBE1}">
+              <a14:hiddenEffects xmlns:a14="http://schemas.microsoft.com/office/drawing/2010/main">
+                <a:effectLst>
+                  <a:outerShdw dist="35921" dir="2700000" algn="ctr" rotWithShape="0">
+                    <a:schemeClr val="bg2"/>
+                  </a:outerShdw>
+                </a:effectLst>
+              </a14:hiddenEffects>
+            </a:ext>
+          </a:extLst>
+        </p:spPr>
+        <p:txBody>
+          <a:bodyPr vert="horz" wrap="square" lIns="91440" tIns="45720" rIns="91440" bIns="45720" numCol="1" anchor="ctr" anchorCtr="0" compatLnSpc="1">
+            <a:prstTxWarp prst="textNoShape">
+              <a:avLst/>
+            </a:prstTxWarp>
+            <a:spAutoFit/>
+          </a:bodyPr>
+          <a:lstStyle/>
+          <a:p>
+            <a:pPr marL="0" marR="0" lvl="0" indent="0" algn="l" defTabSz="914400" rtl="0" eaLnBrk="0" fontAlgn="base" latinLnBrk="0" hangingPunct="0">
+              <a:lnSpc>
+                <a:spcPct val="100000"/>
+              </a:lnSpc>
+              <a:spcBef>
+                <a:spcPct val="0"/>
+              </a:spcBef>
+              <a:spcAft>
+                <a:spcPct val="0"/>
+              </a:spcAft>
+              <a:buClrTx/>
+              <a:buSzTx/>
+              <a:buFontTx/>
+              <a:buNone/>
+              <a:tabLst/>
+            </a:pPr>
+            <a:endParaRPr kumimoji="0" lang="ko-KR" altLang="ko-KR" sz="1800" b="0" i="0" u="none" strike="noStrike" cap="none" normalizeH="0" baseline="0" dirty="0">
+              <a:ln>
+                <a:noFill/>
+              </a:ln>
+              <a:solidFill>
+                <a:schemeClr val="tx1"/>
+              </a:solidFill>
+              <a:effectLst/>
+              <a:latin typeface="Arial" panose="020B0604020202020204" pitchFamily="34" charset="0"/>
+            </a:endParaRPr>
+          </a:p>
+          <a:p>
+            <a:pPr marL="0" marR="0" lvl="0" indent="0" algn="l" defTabSz="914400" rtl="0" eaLnBrk="0" fontAlgn="base" latinLnBrk="0" hangingPunct="0">
+              <a:lnSpc>
+                <a:spcPct val="100000"/>
+              </a:lnSpc>
+              <a:spcBef>
+                <a:spcPct val="0"/>
+              </a:spcBef>
+              <a:spcAft>
+                <a:spcPct val="0"/>
+              </a:spcAft>
+              <a:buClrTx/>
+              <a:buSzTx/>
+              <a:buFontTx/>
+              <a:buChar char="•"/>
+              <a:tabLst/>
+            </a:pPr>
+            <a:r>
+              <a:rPr kumimoji="0" lang="ko-KR" altLang="ko-KR" sz="1800" b="0" i="0" u="none" strike="noStrike" cap="none" normalizeH="0" baseline="0" dirty="0" err="1">
+                <a:ln>
+                  <a:noFill/>
+                </a:ln>
+                <a:solidFill>
+                  <a:schemeClr val="tx1"/>
+                </a:solidFill>
+                <a:effectLst/>
+                <a:latin typeface="Arial" panose="020B0604020202020204" pitchFamily="34" charset="0"/>
+              </a:rPr>
+              <a:t>drug</a:t>
+            </a:r>
+            <a:r>
+              <a:rPr kumimoji="0" lang="ko-KR" altLang="ko-KR" sz="1800" b="0" i="0" u="none" strike="noStrike" cap="none" normalizeH="0" baseline="0" dirty="0">
+                <a:ln>
+                  <a:noFill/>
+                </a:ln>
+                <a:solidFill>
+                  <a:schemeClr val="tx1"/>
+                </a:solidFill>
+                <a:effectLst/>
+                <a:latin typeface="Arial" panose="020B0604020202020204" pitchFamily="34" charset="0"/>
+              </a:rPr>
+              <a:t> </a:t>
+            </a:r>
+            <a:r>
+              <a:rPr kumimoji="0" lang="ko-KR" altLang="ko-KR" sz="1800" b="0" i="0" u="none" strike="noStrike" cap="none" normalizeH="0" baseline="0" dirty="0" err="1">
+                <a:ln>
+                  <a:noFill/>
+                </a:ln>
+                <a:solidFill>
+                  <a:schemeClr val="tx1"/>
+                </a:solidFill>
+                <a:effectLst/>
+                <a:latin typeface="Arial" panose="020B0604020202020204" pitchFamily="34" charset="0"/>
+              </a:rPr>
+              <a:t>name</a:t>
+            </a:r>
+            <a:r>
+              <a:rPr kumimoji="0" lang="ko-KR" altLang="ko-KR" sz="1800" b="0" i="0" u="none" strike="noStrike" cap="none" normalizeH="0" baseline="0" dirty="0">
+                <a:ln>
+                  <a:noFill/>
+                </a:ln>
+                <a:solidFill>
+                  <a:schemeClr val="tx1"/>
+                </a:solidFill>
+                <a:effectLst/>
+                <a:latin typeface="Arial" panose="020B0604020202020204" pitchFamily="34" charset="0"/>
+              </a:rPr>
+              <a:t> </a:t>
+            </a:r>
+          </a:p>
+          <a:p>
+            <a:pPr marL="0" marR="0" lvl="0" indent="0" algn="l" defTabSz="914400" rtl="0" eaLnBrk="0" fontAlgn="base" latinLnBrk="0" hangingPunct="0">
+              <a:lnSpc>
+                <a:spcPct val="100000"/>
+              </a:lnSpc>
+              <a:spcBef>
+                <a:spcPct val="0"/>
+              </a:spcBef>
+              <a:spcAft>
+                <a:spcPct val="0"/>
+              </a:spcAft>
+              <a:buClrTx/>
+              <a:buSzTx/>
+              <a:buFontTx/>
+              <a:buChar char="•"/>
+              <a:tabLst/>
+            </a:pPr>
+            <a:r>
+              <a:rPr kumimoji="0" lang="ko-KR" altLang="ko-KR" sz="1800" b="0" i="0" u="none" strike="noStrike" cap="none" normalizeH="0" baseline="0" dirty="0" err="1">
+                <a:ln>
+                  <a:noFill/>
+                </a:ln>
+                <a:solidFill>
+                  <a:schemeClr val="tx1"/>
+                </a:solidFill>
+                <a:effectLst/>
+                <a:latin typeface="Arial" panose="020B0604020202020204" pitchFamily="34" charset="0"/>
+              </a:rPr>
+              <a:t>condition</a:t>
+            </a:r>
+            <a:r>
+              <a:rPr kumimoji="0" lang="ko-KR" altLang="ko-KR" sz="1800" b="0" i="0" u="none" strike="noStrike" cap="none" normalizeH="0" baseline="0" dirty="0">
+                <a:ln>
+                  <a:noFill/>
+                </a:ln>
+                <a:solidFill>
+                  <a:schemeClr val="tx1"/>
+                </a:solidFill>
+                <a:effectLst/>
+                <a:latin typeface="Arial" panose="020B0604020202020204" pitchFamily="34" charset="0"/>
+              </a:rPr>
+              <a:t> </a:t>
+            </a:r>
+          </a:p>
+          <a:p>
+            <a:pPr marL="0" marR="0" lvl="0" indent="0" algn="l" defTabSz="914400" rtl="0" eaLnBrk="0" fontAlgn="base" latinLnBrk="0" hangingPunct="0">
+              <a:lnSpc>
+                <a:spcPct val="100000"/>
+              </a:lnSpc>
+              <a:spcBef>
+                <a:spcPct val="0"/>
+              </a:spcBef>
+              <a:spcAft>
+                <a:spcPct val="0"/>
+              </a:spcAft>
+              <a:buClrTx/>
+              <a:buSzTx/>
+              <a:buFontTx/>
+              <a:buChar char="•"/>
+              <a:tabLst/>
+            </a:pPr>
+            <a:r>
+              <a:rPr kumimoji="0" lang="ko-KR" altLang="ko-KR" sz="1800" b="0" i="0" u="none" strike="noStrike" cap="none" normalizeH="0" baseline="0" dirty="0" err="1">
+                <a:ln>
+                  <a:noFill/>
+                </a:ln>
+                <a:solidFill>
+                  <a:schemeClr val="tx1"/>
+                </a:solidFill>
+                <a:effectLst/>
+                <a:latin typeface="Arial" panose="020B0604020202020204" pitchFamily="34" charset="0"/>
+              </a:rPr>
+              <a:t>review</a:t>
+            </a:r>
+            <a:r>
+              <a:rPr kumimoji="0" lang="ko-KR" altLang="ko-KR" sz="1800" b="0" i="0" u="none" strike="noStrike" cap="none" normalizeH="0" baseline="0" dirty="0">
+                <a:ln>
+                  <a:noFill/>
+                </a:ln>
+                <a:solidFill>
+                  <a:schemeClr val="tx1"/>
+                </a:solidFill>
+                <a:effectLst/>
+                <a:latin typeface="Arial" panose="020B0604020202020204" pitchFamily="34" charset="0"/>
+              </a:rPr>
+              <a:t> </a:t>
+            </a:r>
+            <a:r>
+              <a:rPr kumimoji="0" lang="ko-KR" altLang="ko-KR" sz="1800" b="0" i="0" u="none" strike="noStrike" cap="none" normalizeH="0" baseline="0" dirty="0" err="1">
+                <a:ln>
+                  <a:noFill/>
+                </a:ln>
+                <a:solidFill>
+                  <a:schemeClr val="tx1"/>
+                </a:solidFill>
+                <a:effectLst/>
+                <a:latin typeface="Arial" panose="020B0604020202020204" pitchFamily="34" charset="0"/>
+              </a:rPr>
+              <a:t>text</a:t>
+            </a:r>
+            <a:r>
+              <a:rPr kumimoji="0" lang="ko-KR" altLang="ko-KR" sz="1800" b="0" i="0" u="none" strike="noStrike" cap="none" normalizeH="0" baseline="0" dirty="0">
+                <a:ln>
+                  <a:noFill/>
+                </a:ln>
+                <a:solidFill>
+                  <a:schemeClr val="tx1"/>
+                </a:solidFill>
+                <a:effectLst/>
+                <a:latin typeface="Arial" panose="020B0604020202020204" pitchFamily="34" charset="0"/>
+              </a:rPr>
+              <a:t> </a:t>
+            </a:r>
+          </a:p>
+          <a:p>
+            <a:pPr marL="0" marR="0" lvl="0" indent="0" algn="l" defTabSz="914400" rtl="0" eaLnBrk="0" fontAlgn="base" latinLnBrk="0" hangingPunct="0">
+              <a:lnSpc>
+                <a:spcPct val="100000"/>
+              </a:lnSpc>
+              <a:spcBef>
+                <a:spcPct val="0"/>
+              </a:spcBef>
+              <a:spcAft>
+                <a:spcPct val="0"/>
+              </a:spcAft>
+              <a:buClrTx/>
+              <a:buSzTx/>
+              <a:buFontTx/>
+              <a:buChar char="•"/>
+              <a:tabLst/>
+            </a:pPr>
+            <a:r>
+              <a:rPr kumimoji="0" lang="ko-KR" altLang="ko-KR" sz="1800" b="0" i="0" u="none" strike="noStrike" cap="none" normalizeH="0" baseline="0" dirty="0" err="1">
+                <a:ln>
+                  <a:noFill/>
+                </a:ln>
+                <a:solidFill>
+                  <a:schemeClr val="tx1"/>
+                </a:solidFill>
+                <a:effectLst/>
+                <a:latin typeface="Arial" panose="020B0604020202020204" pitchFamily="34" charset="0"/>
+              </a:rPr>
+              <a:t>rating</a:t>
+            </a:r>
+            <a:r>
+              <a:rPr kumimoji="0" lang="ko-KR" altLang="ko-KR" sz="1800" b="0" i="0" u="none" strike="noStrike" cap="none" normalizeH="0" baseline="0" dirty="0">
+                <a:ln>
+                  <a:noFill/>
+                </a:ln>
+                <a:solidFill>
+                  <a:schemeClr val="tx1"/>
+                </a:solidFill>
+                <a:effectLst/>
+                <a:latin typeface="Arial" panose="020B0604020202020204" pitchFamily="34" charset="0"/>
+              </a:rPr>
+              <a:t> </a:t>
+            </a:r>
+          </a:p>
+          <a:p>
+            <a:pPr marL="0" marR="0" lvl="0" indent="0" algn="l" defTabSz="914400" rtl="0" eaLnBrk="0" fontAlgn="base" latinLnBrk="0" hangingPunct="0">
+              <a:lnSpc>
+                <a:spcPct val="100000"/>
+              </a:lnSpc>
+              <a:spcBef>
+                <a:spcPct val="0"/>
+              </a:spcBef>
+              <a:spcAft>
+                <a:spcPct val="0"/>
+              </a:spcAft>
+              <a:buClrTx/>
+              <a:buSzTx/>
+              <a:buFontTx/>
+              <a:buChar char="•"/>
+              <a:tabLst/>
+            </a:pPr>
+            <a:r>
+              <a:rPr kumimoji="0" lang="ko-KR" altLang="ko-KR" sz="1800" b="0" i="0" u="none" strike="noStrike" cap="none" normalizeH="0" baseline="0" dirty="0" err="1">
+                <a:ln>
+                  <a:noFill/>
+                </a:ln>
+                <a:solidFill>
+                  <a:schemeClr val="tx1"/>
+                </a:solidFill>
+                <a:effectLst/>
+                <a:latin typeface="Arial" panose="020B0604020202020204" pitchFamily="34" charset="0"/>
+              </a:rPr>
+              <a:t>usefulCount</a:t>
+            </a:r>
+            <a:r>
+              <a:rPr kumimoji="0" lang="ko-KR" altLang="ko-KR" sz="1800" b="0" i="0" u="none" strike="noStrike" cap="none" normalizeH="0" baseline="0" dirty="0">
+                <a:ln>
+                  <a:noFill/>
+                </a:ln>
+                <a:solidFill>
+                  <a:schemeClr val="tx1"/>
+                </a:solidFill>
+                <a:effectLst/>
+                <a:latin typeface="Arial" panose="020B0604020202020204" pitchFamily="34" charset="0"/>
+              </a:rPr>
+              <a:t> </a:t>
+            </a:r>
+          </a:p>
+        </p:txBody>
+      </p:sp>
     </p:spTree>
     <p:extLst>
       <p:ext uri="{BB962C8B-B14F-4D97-AF65-F5344CB8AC3E}">
@@ -6707,7 +7187,7 @@
         <p:spPr>
           <a:xfrm>
             <a:off x="863413" y="1499378"/>
-            <a:ext cx="9991330" cy="2031325"/>
+            <a:ext cx="9991330" cy="2585323"/>
           </a:xfrm>
           <a:prstGeom prst="rect">
             <a:avLst/>
@@ -6746,7 +7226,31 @@
                 <a:latin typeface="나눔고딕" panose="020D0604000000000000" pitchFamily="50" charset="-127"/>
                 <a:ea typeface="나눔고딕" panose="020D0604000000000000" pitchFamily="50" charset="-127"/>
               </a:rPr>
-              <a:t>비약적인 성능향상</a:t>
+              <a:t>비약적인 성능향상 </a:t>
+            </a:r>
+            <a:r>
+              <a:rPr lang="en-US" altLang="ko-KR" dirty="0">
+                <a:latin typeface="나눔고딕" panose="020D0604000000000000" pitchFamily="50" charset="-127"/>
+                <a:ea typeface="나눔고딕" panose="020D0604000000000000" pitchFamily="50" charset="-127"/>
+                <a:sym typeface="Wingdings" panose="05000000000000000000" pitchFamily="2" charset="2"/>
+              </a:rPr>
+              <a:t> </a:t>
+            </a:r>
+            <a:r>
+              <a:rPr lang="ko-KR" altLang="en-US" dirty="0">
+                <a:latin typeface="나눔고딕" panose="020D0604000000000000" pitchFamily="50" charset="-127"/>
+                <a:ea typeface="나눔고딕" panose="020D0604000000000000" pitchFamily="50" charset="-127"/>
+                <a:sym typeface="Wingdings" panose="05000000000000000000" pitchFamily="2" charset="2"/>
+              </a:rPr>
+              <a:t>미묘한 감정까지 잘 잡을 수 있다</a:t>
+            </a:r>
+            <a:r>
+              <a:rPr lang="en-US" altLang="ko-KR" dirty="0">
+                <a:latin typeface="나눔고딕" panose="020D0604000000000000" pitchFamily="50" charset="-127"/>
+                <a:ea typeface="나눔고딕" panose="020D0604000000000000" pitchFamily="50" charset="-127"/>
+                <a:sym typeface="Wingdings" panose="05000000000000000000" pitchFamily="2" charset="2"/>
+              </a:rPr>
+              <a:t>.</a:t>
             </a:r>
             <a:endParaRPr lang="en-US" altLang="ko-KR" dirty="0">
               <a:latin typeface="나눔고딕" panose="020D0604000000000000" pitchFamily="50" charset="-127"/>
@@ -6763,7 +7267,7 @@
                 <a:latin typeface="나눔고딕" panose="020D0604000000000000" pitchFamily="50" charset="-127"/>
                 <a:ea typeface="나눔고딕" panose="020D0604000000000000" pitchFamily="50" charset="-127"/>
               </a:rPr>
-              <a:t>해석가능성</a:t>
+              <a:t>해석가능성 </a:t>
             </a:r>
             <a:endParaRPr lang="en-US" altLang="ko-KR" dirty="0">
               <a:latin typeface="나눔고딕" panose="020D0604000000000000" pitchFamily="50" charset="-127"/>
@@ -6810,25 +7314,79 @@
               <a:buChar char="v"/>
             </a:pPr>
             <a:r>
+              <a:rPr lang="en-US" altLang="ko-KR" dirty="0">
+                <a:latin typeface="나눔고딕" panose="020D0604000000000000" pitchFamily="50" charset="-127"/>
+                <a:ea typeface="나눔고딕" panose="020D0604000000000000" pitchFamily="50" charset="-127"/>
+              </a:rPr>
+              <a:t>LLM</a:t>
+            </a:r>
+            <a:r>
               <a:rPr lang="ko-KR" altLang="en-US" dirty="0">
                 <a:latin typeface="나눔고딕" panose="020D0604000000000000" pitchFamily="50" charset="-127"/>
                 <a:ea typeface="나눔고딕" panose="020D0604000000000000" pitchFamily="50" charset="-127"/>
               </a:rPr>
-              <a:t>높은 </a:t>
+              <a:t>을 </a:t>
             </a:r>
             <a:r>
               <a:rPr lang="en-US" altLang="ko-KR" dirty="0">
                 <a:latin typeface="나눔고딕" panose="020D0604000000000000" pitchFamily="50" charset="-127"/>
                 <a:ea typeface="나눔고딕" panose="020D0604000000000000" pitchFamily="50" charset="-127"/>
               </a:rPr>
-              <a:t>API </a:t>
+              <a:t>feature extractor</a:t>
             </a:r>
             <a:r>
               <a:rPr lang="ko-KR" altLang="en-US" dirty="0">
                 <a:latin typeface="나눔고딕" panose="020D0604000000000000" pitchFamily="50" charset="-127"/>
                 <a:ea typeface="나눔고딕" panose="020D0604000000000000" pitchFamily="50" charset="-127"/>
               </a:rPr>
-              <a:t>의존도</a:t>
+              <a:t>로만 사용하였다</a:t>
+            </a:r>
+            <a:r>
+              <a:rPr lang="en-US" altLang="ko-KR" dirty="0">
+                <a:latin typeface="나눔고딕" panose="020D0604000000000000" pitchFamily="50" charset="-127"/>
+                <a:ea typeface="나눔고딕" panose="020D0604000000000000" pitchFamily="50" charset="-127"/>
+              </a:rPr>
+              <a:t>.</a:t>
+            </a:r>
+          </a:p>
+          <a:p>
+            <a:pPr marL="742950" lvl="1" indent="-285750">
+              <a:buFont typeface="Wingdings" panose="05000000000000000000" pitchFamily="2" charset="2"/>
+              <a:buChar char="v"/>
+            </a:pPr>
+            <a:r>
+              <a:rPr lang="en-US" altLang="ko-KR" dirty="0">
+                <a:latin typeface="나눔고딕" panose="020D0604000000000000" pitchFamily="50" charset="-127"/>
+                <a:ea typeface="나눔고딕" panose="020D0604000000000000" pitchFamily="50" charset="-127"/>
+              </a:rPr>
+              <a:t>LLM</a:t>
+            </a:r>
+            <a:r>
+              <a:rPr lang="ko-KR" altLang="en-US" dirty="0">
+                <a:latin typeface="나눔고딕" panose="020D0604000000000000" pitchFamily="50" charset="-127"/>
+                <a:ea typeface="나눔고딕" panose="020D0604000000000000" pitchFamily="50" charset="-127"/>
+              </a:rPr>
+              <a:t> 활용 구조가 제한적 </a:t>
+            </a:r>
+            <a:r>
+              <a:rPr lang="en-US" altLang="ko-KR" dirty="0">
+                <a:latin typeface="나눔고딕" panose="020D0604000000000000" pitchFamily="50" charset="-127"/>
+                <a:ea typeface="나눔고딕" panose="020D0604000000000000" pitchFamily="50" charset="-127"/>
+              </a:rPr>
+              <a:t>: embedding only</a:t>
+            </a:r>
+          </a:p>
+          <a:p>
+            <a:pPr marL="742950" lvl="1" indent="-285750">
+              <a:buFont typeface="Wingdings" panose="05000000000000000000" pitchFamily="2" charset="2"/>
+              <a:buChar char="v"/>
+            </a:pPr>
+            <a:r>
+              <a:rPr lang="ko-KR" altLang="en-US" dirty="0">
+                <a:latin typeface="나눔고딕" panose="020D0604000000000000" pitchFamily="50" charset="-127"/>
+                <a:ea typeface="나눔고딕" panose="020D0604000000000000" pitchFamily="50" charset="-127"/>
+              </a:rPr>
+              <a:t>데이터 의존성 문제</a:t>
             </a:r>
             <a:endParaRPr lang="en-US" altLang="ko-KR" dirty="0">
               <a:latin typeface="나눔고딕" panose="020D0604000000000000" pitchFamily="50" charset="-127"/>
@@ -6845,7 +7403,21 @@
                 <a:latin typeface="나눔고딕" panose="020D0604000000000000" pitchFamily="50" charset="-127"/>
                 <a:ea typeface="나눔고딕" panose="020D0604000000000000" pitchFamily="50" charset="-127"/>
               </a:rPr>
-              <a:t>도메인 제약</a:t>
+              <a:t>비용</a:t>
+            </a:r>
+            <a:r>
+              <a:rPr lang="en-US" altLang="ko-KR" dirty="0">
+                <a:latin typeface="나눔고딕" panose="020D0604000000000000" pitchFamily="50" charset="-127"/>
+                <a:ea typeface="나눔고딕" panose="020D0604000000000000" pitchFamily="50" charset="-127"/>
+              </a:rPr>
+              <a:t> </a:t>
+            </a:r>
+            <a:r>
+              <a:rPr lang="ko-KR" altLang="en-US" dirty="0">
+                <a:latin typeface="나눔고딕" panose="020D0604000000000000" pitchFamily="50" charset="-127"/>
+                <a:ea typeface="나눔고딕" panose="020D0604000000000000" pitchFamily="50" charset="-127"/>
+              </a:rPr>
+              <a:t>대비 효율 문제</a:t>
             </a:r>
             <a:endParaRPr lang="en-US" altLang="ko-KR" dirty="0">
               <a:latin typeface="나눔고딕" panose="020D0604000000000000" pitchFamily="50" charset="-127"/>
